--- a/parent-ai-training/AI시대_학부모연수_20260917.pptx
+++ b/parent-ai-training/AI시대_학부모연수_20260917.pptx
@@ -877,7 +877,7 @@
                 <a:ea typeface="맑은 고딕"/>
                 <a:cs typeface="맑은 고딕"/>
               </a:rPr>
-              <a:t>표의 내용은 2026년 9월 확인 기준이며, 정책은 자주 바뀝니다. 연수 직전에 다시 확인하시고 바뀐 부분이 있으면 구두로 정정해 주십시오.</a:t>
+              <a:t>계정 이야기는 이 한 장으로 정리됩니다. 네 줄을 차례로 읽어 주세요.</a:t>
             </a:r>
           </a:p>
           <a:p>
@@ -887,7 +887,7 @@
                 <a:ea typeface="맑은 고딕"/>
                 <a:cs typeface="맑은 고딕"/>
               </a:rPr>
-              <a:t>핵심 메시지: ①일반 소비자용 서비스와 학교가 제공하는 교육용 계정은 조건이 다릅니다. ②부모 계정을 그냥 빌려주는 방식은 서비스가 정한 연령·계정 공유 조건을 벗어날 수 있습니다. ③‘보호자 동의’는 서류상 동의가 아니라 함께 쓰는 실제 습관을 뜻한다고 풀어 주십시오.</a:t>
+              <a:t>①ChatGPT는 약관상 만 13세 이상입니다. 초등학생은 자기 이름으로 가입할 수 없습니다. ②Gemini는 예외적으로 길이 있습니다. 보호자가 Family Link에서 자녀 계정에 접근을 켜 주는 방식이라, 부모 설정이 먼저입니다. ③국내 개인정보 보호법상 만 14세 미만은 보호자 동의가 필수입니다. 초등학생은 대부분 여기에 해당합니다. ‘구글로 로그인’ 같은 소셜 로그인도 개인정보를 그 서비스에 넘기는 데 동의하는 절차라는 점을 짚어 주시면 좋겠습니다.</a:t>
             </a:r>
           </a:p>
           <a:p>
@@ -897,7 +897,7 @@
                 <a:ea typeface="맑은 고딕"/>
                 <a:cs typeface="맑은 고딕"/>
               </a:rPr>
-              <a:t>‘자녀 계정 연결’ 질문이 나오면: 부모 계정과 아이 본인 계정을 묶는 기능이며, 아이가 이미 자기 계정을 가지고 있어야 합니다(만 13~18세). 부모가 설정 → 자녀 보호 기능 → 가족 구성원 추가에서 전화번호나 이메일로 초대하면 아이가 링크를 눌러 수락합니다. 연결하면 사용 금지 시간대(Quiet hours), 음성 모드·이미지 생성·메모리 끄기, 민감 콘텐츠 제한을 부모가 정할 수 있고, 연결된 동안 아이는 이 설정을 바꿀 수 없습니다.</a:t>
+              <a:t>④서울시교육청 「학교급별 생성형 AI 활용 지침」은 초등학생의 경우 교사 시연을 통한 간접 체험을 원칙으로 하고, 교사가 추가 작업으로 안정성을 확보하면 직접 사용도 가능하다고 안내합니다. 수업이나 방과후에 활용할 때는 가정통신문 등으로 학부모 동의를 받습니다.</a:t>
             </a:r>
           </a:p>
           <a:p>
@@ -907,7 +907,7 @@
                 <a:ea typeface="맑은 고딕"/>
                 <a:cs typeface="맑은 고딕"/>
               </a:rPr>
-              <a:t>다만 부모가 아이의 대화 내용을 읽을 수는 없습니다. 학부모가 가장 많이 오해하는 지점이므로 먼저 짚어 주십시오. 감시 도구가 아니라 사용 조건을 거는 도구입니다.</a:t>
+              <a:t>※ 이 항목은 서울시교육청 기준입니다. 다른 지역이라면 해당 시도교육청 지침을 확인해 바꿔서 안내해 주십시오.</a:t>
             </a:r>
           </a:p>
           <a:p>
@@ -917,7 +917,7 @@
                 <a:ea typeface="맑은 고딕"/>
                 <a:cs typeface="맑은 고딕"/>
               </a:rPr>
-              <a:t>초등학교 학부모에게는 아직 해당하지 않는 기능입니다. 13세 미만은 계정 자체를 만들 수 없으므로 지금은 보호자 동반 사용이 기본이고, 중학교에 올라가면 쓸 수 있는 기능이라고 예고하는 정도로 안내하십시오.</a:t>
+              <a:t>‘자녀 계정 연결’ 질문이 나오면: ChatGPT의 보호자 관리 기능은 부모 계정과 아이 본인 계정을 묶는 것이라 만 13~18세용입니다. 초등학생은 계정 자체가 없으니 해당되지 않습니다. 그 기능도 사용 금지 시간대나 기능 제한은 걸 수 있지만 대화 내용을 읽을 수는 없습니다.</a:t>
             </a:r>
           </a:p>
           <a:p>
@@ -927,7 +927,7 @@
                 <a:ea typeface="맑은 고딕"/>
                 <a:cs typeface="맑은 고딕"/>
               </a:rPr>
-              <a:t>특정 제품을 권하거나 비교 평가하는 자리가 아님을 분명히 하고, 두 서비스는 예시로만 제시합니다.</a:t>
+              <a:t>정리 문장을 크게 읽어 주세요. 오늘 계정 부분에서 가져갈 것은 이 한 줄입니다.</a:t>
             </a:r>
           </a:p>
         </p:txBody>
@@ -10808,7 +10808,7 @@
                 <a:ea typeface="맑은 고딕"/>
                 <a:cs typeface="맑은 고딕"/>
               </a:rPr>
-              <a:t>첫 번째 관문 · 이용 조건</a:t>
+              <a:t>첫 번째 관문 · 계정</a:t>
             </a:r>
           </a:p>
         </p:txBody>
@@ -10893,7 +10893,7 @@
                 <a:ea typeface="맑은 고딕"/>
                 <a:cs typeface="맑은 고딕"/>
               </a:rPr>
-              <a:t>부모 휴대폰, 어디까지 빌려줄까요?</a:t>
+              <a:t>초등학생에게 ‘본인 계정’은 존재하지 않습니다</a:t>
             </a:r>
           </a:p>
         </p:txBody>
@@ -10934,7 +10934,7 @@
                 <a:ea typeface="맑은 고딕"/>
                 <a:cs typeface="맑은 고딕"/>
               </a:rPr>
-              <a:t>빌려주기 전에, 그 서비스가 정해 둔 조건부터 보셔야 합니다.</a:t>
+              <a:t>계정을 빌려주는 게 아니라, 부모 계정을 함께 쓴다고 생각해 주세요.</a:t>
             </a:r>
           </a:p>
         </p:txBody>
@@ -10947,8 +10947,8 @@
         </p:nvSpPr>
         <p:spPr>
           <a:xfrm>
-            <a:off x="777240" y="2057400"/>
-            <a:ext cx="5135727" cy="1719072"/>
+            <a:off x="777240" y="2084832"/>
+            <a:ext cx="10637215" cy="3017520"/>
           </a:xfrm>
           <a:prstGeom prst="roundRect">
             <a:avLst>
@@ -10956,224 +10956,7 @@
             </a:avLst>
           </a:prstGeom>
           <a:solidFill>
-            <a:srgbClr val="E8EFFC"/>
-          </a:solidFill>
-          <a:ln>
-            <a:noFill/>
-          </a:ln>
-          <a:effectLst/>
-        </p:spPr>
-        <p:style>
-          <a:lnRef idx="1">
-            <a:schemeClr val="accent1"/>
-          </a:lnRef>
-          <a:fillRef idx="3">
-            <a:schemeClr val="accent1"/>
-          </a:fillRef>
-          <a:effectRef idx="2">
-            <a:schemeClr val="accent1"/>
-          </a:effectRef>
-          <a:fontRef idx="minor">
-            <a:schemeClr val="lt1"/>
-          </a:fontRef>
-        </p:style>
-        <p:txBody>
-          <a:bodyPr rtlCol="0" anchor="ctr" wrap="square"/>
-          <a:lstStyle/>
-          <a:p>
-            <a:pPr algn="ctr"/>
-          </a:p>
-        </p:txBody>
-      </p:sp>
-      <p:sp>
-        <p:nvSpPr>
-          <p:cNvPr id="7" name="Rectangle 6"/>
-          <p:cNvSpPr/>
-          <p:nvPr/>
-        </p:nvSpPr>
-        <p:spPr>
-          <a:xfrm>
-            <a:off x="1033271" y="2313432"/>
-            <a:ext cx="384048" cy="45720"/>
-          </a:xfrm>
-          <a:prstGeom prst="rect">
-            <a:avLst/>
-          </a:prstGeom>
-          <a:solidFill>
-            <a:srgbClr val="1D4ED8"/>
-          </a:solidFill>
-          <a:ln>
-            <a:noFill/>
-          </a:ln>
-          <a:effectLst/>
-        </p:spPr>
-        <p:style>
-          <a:lnRef idx="1">
-            <a:schemeClr val="accent1"/>
-          </a:lnRef>
-          <a:fillRef idx="3">
-            <a:schemeClr val="accent1"/>
-          </a:fillRef>
-          <a:effectRef idx="2">
-            <a:schemeClr val="accent1"/>
-          </a:effectRef>
-          <a:fontRef idx="minor">
-            <a:schemeClr val="lt1"/>
-          </a:fontRef>
-        </p:style>
-        <p:txBody>
-          <a:bodyPr rtlCol="0" anchor="ctr"/>
-          <a:lstStyle/>
-          <a:p>
-            <a:pPr algn="ctr"/>
-          </a:p>
-        </p:txBody>
-      </p:sp>
-      <p:sp>
-        <p:nvSpPr>
-          <p:cNvPr id="8" name="TextBox 7"/>
-          <p:cNvSpPr txBox="1"/>
-          <p:nvPr/>
-        </p:nvSpPr>
-        <p:spPr>
-          <a:xfrm>
-            <a:off x="1033271" y="2478024"/>
-            <a:ext cx="4623663" cy="384048"/>
-          </a:xfrm>
-          <a:prstGeom prst="rect">
-            <a:avLst/>
-          </a:prstGeom>
-          <a:noFill/>
-        </p:spPr>
-        <p:txBody>
-          <a:bodyPr wrap="square" anchor="t" lIns="0" rIns="0" tIns="0" bIns="0">
-            <a:spAutoFit/>
-          </a:bodyPr>
-          <a:lstStyle/>
-          <a:p>
-            <a:pPr algn="l">
-              <a:lnSpc>
-                <a:spcPct val="112000"/>
-              </a:lnSpc>
-            </a:pPr>
-            <a:r>
-              <a:rPr sz="1750" b="1">
-                <a:solidFill>
-                  <a:srgbClr val="1F2933"/>
-                </a:solidFill>
-                <a:latin typeface="맑은 고딕"/>
-                <a:ea typeface="맑은 고딕"/>
-                <a:cs typeface="맑은 고딕"/>
-              </a:rPr>
-              <a:t>보호자와 함께 쓰기</a:t>
-            </a:r>
-          </a:p>
-        </p:txBody>
-      </p:sp>
-      <p:sp>
-        <p:nvSpPr>
-          <p:cNvPr id="9" name="TextBox 8"/>
-          <p:cNvSpPr txBox="1"/>
-          <p:nvPr/>
-        </p:nvSpPr>
-        <p:spPr>
-          <a:xfrm>
-            <a:off x="1033271" y="2904134"/>
-            <a:ext cx="4623663" cy="762609"/>
-          </a:xfrm>
-          <a:prstGeom prst="rect">
-            <a:avLst/>
-          </a:prstGeom>
-          <a:noFill/>
-        </p:spPr>
-        <p:txBody>
-          <a:bodyPr wrap="square" anchor="t" lIns="0" rIns="0" tIns="0" bIns="0">
-            <a:spAutoFit/>
-          </a:bodyPr>
-          <a:lstStyle/>
-          <a:p>
-            <a:pPr algn="l">
-              <a:lnSpc>
-                <a:spcPct val="132000"/>
-              </a:lnSpc>
-              <a:spcAft>
-                <a:spcPts val="400"/>
-              </a:spcAft>
-            </a:pPr>
-            <a:r>
-              <a:rPr sz="1300" b="0">
-                <a:solidFill>
-                  <a:srgbClr val="3E4C59"/>
-                </a:solidFill>
-                <a:latin typeface="맑은 고딕"/>
-                <a:ea typeface="맑은 고딕"/>
-                <a:cs typeface="맑은 고딕"/>
-              </a:rPr>
-              <a:t>· 무엇을 알아볼지 먼저 정합니다</a:t>
-            </a:r>
-          </a:p>
-          <a:p>
-            <a:pPr algn="l">
-              <a:lnSpc>
-                <a:spcPct val="132000"/>
-              </a:lnSpc>
-              <a:spcAft>
-                <a:spcPts val="400"/>
-              </a:spcAft>
-            </a:pPr>
-            <a:r>
-              <a:rPr sz="1300" b="0">
-                <a:solidFill>
-                  <a:srgbClr val="3E4C59"/>
-                </a:solidFill>
-                <a:latin typeface="맑은 고딕"/>
-                <a:ea typeface="맑은 고딕"/>
-                <a:cs typeface="맑은 고딕"/>
-              </a:rPr>
-              <a:t>· 어떤 정보를 넣을지 함께 봅니다</a:t>
-            </a:r>
-          </a:p>
-          <a:p>
-            <a:pPr algn="l">
-              <a:lnSpc>
-                <a:spcPct val="132000"/>
-              </a:lnSpc>
-              <a:spcAft>
-                <a:spcPts val="400"/>
-              </a:spcAft>
-            </a:pPr>
-            <a:r>
-              <a:rPr sz="1300" b="0">
-                <a:solidFill>
-                  <a:srgbClr val="3E4C59"/>
-                </a:solidFill>
-                <a:latin typeface="맑은 고딕"/>
-                <a:ea typeface="맑은 고딕"/>
-                <a:cs typeface="맑은 고딕"/>
-              </a:rPr>
-              <a:t>· 언제 끝낼지 미리 약속합니다</a:t>
-            </a:r>
-          </a:p>
-        </p:txBody>
-      </p:sp>
-      <p:sp>
-        <p:nvSpPr>
-          <p:cNvPr id="10" name="Rounded Rectangle 9"/>
-          <p:cNvSpPr/>
-          <p:nvPr/>
-        </p:nvSpPr>
-        <p:spPr>
-          <a:xfrm>
-            <a:off x="6278727" y="2057400"/>
-            <a:ext cx="5135727" cy="1719072"/>
-          </a:xfrm>
-          <a:prstGeom prst="roundRect">
-            <a:avLst>
-              <a:gd name="adj" fmla="val 6000"/>
-            </a:avLst>
-          </a:prstGeom>
-          <a:solidFill>
-            <a:srgbClr val="F3F6FA"/>
+            <a:srgbClr val="FFFFFF"/>
           </a:solidFill>
           <a:ln w="15875">
             <a:solidFill>
@@ -11206,232 +10989,13 @@
       </p:sp>
       <p:sp>
         <p:nvSpPr>
-          <p:cNvPr id="11" name="Rectangle 10"/>
+          <p:cNvPr id="7" name="Rectangle 6"/>
           <p:cNvSpPr/>
           <p:nvPr/>
         </p:nvSpPr>
         <p:spPr>
           <a:xfrm>
-            <a:off x="6534759" y="2313432"/>
-            <a:ext cx="384048" cy="45720"/>
-          </a:xfrm>
-          <a:prstGeom prst="rect">
-            <a:avLst/>
-          </a:prstGeom>
-          <a:solidFill>
-            <a:srgbClr val="0E7C86"/>
-          </a:solidFill>
-          <a:ln>
-            <a:noFill/>
-          </a:ln>
-          <a:effectLst/>
-        </p:spPr>
-        <p:style>
-          <a:lnRef idx="1">
-            <a:schemeClr val="accent1"/>
-          </a:lnRef>
-          <a:fillRef idx="3">
-            <a:schemeClr val="accent1"/>
-          </a:fillRef>
-          <a:effectRef idx="2">
-            <a:schemeClr val="accent1"/>
-          </a:effectRef>
-          <a:fontRef idx="minor">
-            <a:schemeClr val="lt1"/>
-          </a:fontRef>
-        </p:style>
-        <p:txBody>
-          <a:bodyPr rtlCol="0" anchor="ctr"/>
-          <a:lstStyle/>
-          <a:p>
-            <a:pPr algn="ctr"/>
-          </a:p>
-        </p:txBody>
-      </p:sp>
-      <p:sp>
-        <p:nvSpPr>
-          <p:cNvPr id="12" name="TextBox 11"/>
-          <p:cNvSpPr txBox="1"/>
-          <p:nvPr/>
-        </p:nvSpPr>
-        <p:spPr>
-          <a:xfrm>
-            <a:off x="6534759" y="2478024"/>
-            <a:ext cx="4623663" cy="384048"/>
-          </a:xfrm>
-          <a:prstGeom prst="rect">
-            <a:avLst/>
-          </a:prstGeom>
-          <a:noFill/>
-        </p:spPr>
-        <p:txBody>
-          <a:bodyPr wrap="square" anchor="t" lIns="0" rIns="0" tIns="0" bIns="0">
-            <a:spAutoFit/>
-          </a:bodyPr>
-          <a:lstStyle/>
-          <a:p>
-            <a:pPr algn="l">
-              <a:lnSpc>
-                <a:spcPct val="112000"/>
-              </a:lnSpc>
-            </a:pPr>
-            <a:r>
-              <a:rPr sz="1750" b="1">
-                <a:solidFill>
-                  <a:srgbClr val="1F2933"/>
-                </a:solidFill>
-                <a:latin typeface="맑은 고딕"/>
-                <a:ea typeface="맑은 고딕"/>
-                <a:cs typeface="맑은 고딕"/>
-              </a:rPr>
-              <a:t>아이 혼자 쓰기</a:t>
-            </a:r>
-          </a:p>
-        </p:txBody>
-      </p:sp>
-      <p:sp>
-        <p:nvSpPr>
-          <p:cNvPr id="13" name="TextBox 12"/>
-          <p:cNvSpPr txBox="1"/>
-          <p:nvPr/>
-        </p:nvSpPr>
-        <p:spPr>
-          <a:xfrm>
-            <a:off x="6534759" y="2904134"/>
-            <a:ext cx="4623663" cy="762609"/>
-          </a:xfrm>
-          <a:prstGeom prst="rect">
-            <a:avLst/>
-          </a:prstGeom>
-          <a:noFill/>
-        </p:spPr>
-        <p:txBody>
-          <a:bodyPr wrap="square" anchor="t" lIns="0" rIns="0" tIns="0" bIns="0">
-            <a:spAutoFit/>
-          </a:bodyPr>
-          <a:lstStyle/>
-          <a:p>
-            <a:pPr algn="l">
-              <a:lnSpc>
-                <a:spcPct val="132000"/>
-              </a:lnSpc>
-              <a:spcAft>
-                <a:spcPts val="400"/>
-              </a:spcAft>
-            </a:pPr>
-            <a:r>
-              <a:rPr sz="1300" b="0">
-                <a:solidFill>
-                  <a:srgbClr val="3E4C59"/>
-                </a:solidFill>
-                <a:latin typeface="맑은 고딕"/>
-                <a:ea typeface="맑은 고딕"/>
-                <a:cs typeface="맑은 고딕"/>
-              </a:rPr>
-              <a:t>· 10장의 준비도 네 가지를 갖췄을 때</a:t>
-            </a:r>
-          </a:p>
-          <a:p>
-            <a:pPr algn="l">
-              <a:lnSpc>
-                <a:spcPct val="132000"/>
-              </a:lnSpc>
-              <a:spcAft>
-                <a:spcPts val="400"/>
-              </a:spcAft>
-            </a:pPr>
-            <a:r>
-              <a:rPr sz="1300" b="0">
-                <a:solidFill>
-                  <a:srgbClr val="3E4C59"/>
-                </a:solidFill>
-                <a:latin typeface="맑은 고딕"/>
-                <a:ea typeface="맑은 고딕"/>
-                <a:cs typeface="맑은 고딕"/>
-              </a:rPr>
-              <a:t>· 사용 목적과 시간을 정해 둔 상태에서</a:t>
-            </a:r>
-          </a:p>
-          <a:p>
-            <a:pPr algn="l">
-              <a:lnSpc>
-                <a:spcPct val="132000"/>
-              </a:lnSpc>
-              <a:spcAft>
-                <a:spcPts val="400"/>
-              </a:spcAft>
-            </a:pPr>
-            <a:r>
-              <a:rPr sz="1300" b="0">
-                <a:solidFill>
-                  <a:srgbClr val="3E4C59"/>
-                </a:solidFill>
-                <a:latin typeface="맑은 고딕"/>
-                <a:ea typeface="맑은 고딕"/>
-                <a:cs typeface="맑은 고딕"/>
-              </a:rPr>
-              <a:t>· 무엇을 물었는지 나중에 이야기하기로</a:t>
-            </a:r>
-          </a:p>
-        </p:txBody>
-      </p:sp>
-      <p:sp>
-        <p:nvSpPr>
-          <p:cNvPr id="14" name="Rounded Rectangle 13"/>
-          <p:cNvSpPr/>
-          <p:nvPr/>
-        </p:nvSpPr>
-        <p:spPr>
-          <a:xfrm>
-            <a:off x="777240" y="3895344"/>
-            <a:ext cx="10637215" cy="1353312"/>
-          </a:xfrm>
-          <a:prstGeom prst="roundRect">
-            <a:avLst>
-              <a:gd name="adj" fmla="val 8000"/>
-            </a:avLst>
-          </a:prstGeom>
-          <a:solidFill>
-            <a:srgbClr val="F3F6FA"/>
-          </a:solidFill>
-          <a:ln w="15875">
-            <a:solidFill>
-              <a:srgbClr val="D9E0E8"/>
-            </a:solidFill>
-          </a:ln>
-          <a:effectLst/>
-        </p:spPr>
-        <p:style>
-          <a:lnRef idx="1">
-            <a:schemeClr val="accent1"/>
-          </a:lnRef>
-          <a:fillRef idx="3">
-            <a:schemeClr val="accent1"/>
-          </a:fillRef>
-          <a:effectRef idx="2">
-            <a:schemeClr val="accent1"/>
-          </a:effectRef>
-          <a:fontRef idx="minor">
-            <a:schemeClr val="lt1"/>
-          </a:fontRef>
-        </p:style>
-        <p:txBody>
-          <a:bodyPr rtlCol="0" anchor="ctr" wrap="square"/>
-          <a:lstStyle/>
-          <a:p>
-            <a:pPr algn="ctr"/>
-          </a:p>
-        </p:txBody>
-      </p:sp>
-      <p:sp>
-        <p:nvSpPr>
-          <p:cNvPr id="15" name="Rectangle 14"/>
-          <p:cNvSpPr/>
-          <p:nvPr/>
-        </p:nvSpPr>
-        <p:spPr>
-          <a:xfrm>
-            <a:off x="777240" y="3895344"/>
+            <a:off x="777240" y="2084832"/>
             <a:ext cx="10637215" cy="402336"/>
           </a:xfrm>
           <a:prstGeom prst="rect">
@@ -11469,14 +11033,14 @@
       </p:sp>
       <p:sp>
         <p:nvSpPr>
-          <p:cNvPr id="16" name="TextBox 15"/>
-          <p:cNvSpPr txBox="1"/>
-          <p:nvPr/>
-        </p:nvSpPr>
-        <p:spPr>
-          <a:xfrm>
-            <a:off x="1097280" y="4005072"/>
-            <a:ext cx="3291840" cy="274320"/>
+          <p:cNvPr id="8" name="TextBox 7"/>
+          <p:cNvSpPr txBox="1"/>
+          <p:nvPr/>
+        </p:nvSpPr>
+        <p:spPr>
+          <a:xfrm>
+            <a:off x="1097280" y="2194560"/>
+            <a:ext cx="4663440" cy="274320"/>
           </a:xfrm>
           <a:prstGeom prst="rect">
             <a:avLst/>
@@ -11503,21 +11067,21 @@
                 <a:ea typeface="맑은 고딕"/>
                 <a:cs typeface="맑은 고딕"/>
               </a:rPr>
-              <a:t>서비스</a:t>
-            </a:r>
-          </a:p>
-        </p:txBody>
-      </p:sp>
-      <p:sp>
-        <p:nvSpPr>
-          <p:cNvPr id="17" name="TextBox 16"/>
-          <p:cNvSpPr txBox="1"/>
-          <p:nvPr/>
-        </p:nvSpPr>
-        <p:spPr>
-          <a:xfrm>
-            <a:off x="3383280" y="4005072"/>
-            <a:ext cx="3291840" cy="274320"/>
+              <a:t>기준</a:t>
+            </a:r>
+          </a:p>
+        </p:txBody>
+      </p:sp>
+      <p:sp>
+        <p:nvSpPr>
+          <p:cNvPr id="9" name="TextBox 8"/>
+          <p:cNvSpPr txBox="1"/>
+          <p:nvPr/>
+        </p:nvSpPr>
+        <p:spPr>
+          <a:xfrm>
+            <a:off x="6400800" y="2194560"/>
+            <a:ext cx="4709160" cy="274320"/>
           </a:xfrm>
           <a:prstGeom prst="rect">
             <a:avLst/>
@@ -11544,475 +11108,21 @@
                 <a:ea typeface="맑은 고딕"/>
                 <a:cs typeface="맑은 고딕"/>
               </a:rPr>
-              <a:t>연령·동의 조건</a:t>
-            </a:r>
-          </a:p>
-        </p:txBody>
-      </p:sp>
-      <p:sp>
-        <p:nvSpPr>
-          <p:cNvPr id="18" name="TextBox 17"/>
-          <p:cNvSpPr txBox="1"/>
-          <p:nvPr/>
-        </p:nvSpPr>
-        <p:spPr>
-          <a:xfrm>
-            <a:off x="6583679" y="4005072"/>
-            <a:ext cx="3291840" cy="274320"/>
-          </a:xfrm>
-          <a:prstGeom prst="rect">
-            <a:avLst/>
-          </a:prstGeom>
-          <a:noFill/>
-        </p:spPr>
-        <p:txBody>
-          <a:bodyPr wrap="square" anchor="t" lIns="0" rIns="0" tIns="0" bIns="0">
-            <a:spAutoFit/>
-          </a:bodyPr>
-          <a:lstStyle/>
-          <a:p>
-            <a:pPr algn="l">
-              <a:lnSpc>
-                <a:spcPct val="115000"/>
-              </a:lnSpc>
-            </a:pPr>
-            <a:r>
-              <a:rPr sz="1250" b="1">
-                <a:solidFill>
-                  <a:srgbClr val="0E7C86"/>
-                </a:solidFill>
-                <a:latin typeface="맑은 고딕"/>
-                <a:ea typeface="맑은 고딕"/>
-                <a:cs typeface="맑은 고딕"/>
-              </a:rPr>
-              <a:t>보호자가 할 수 있는 것</a:t>
-            </a:r>
-          </a:p>
-        </p:txBody>
-      </p:sp>
-      <p:sp>
-        <p:nvSpPr>
-          <p:cNvPr id="19" name="TextBox 18"/>
-          <p:cNvSpPr txBox="1"/>
-          <p:nvPr/>
-        </p:nvSpPr>
-        <p:spPr>
-          <a:xfrm>
-            <a:off x="1097280" y="4352544"/>
-            <a:ext cx="2194560" cy="274320"/>
-          </a:xfrm>
-          <a:prstGeom prst="rect">
-            <a:avLst/>
-          </a:prstGeom>
-          <a:noFill/>
-        </p:spPr>
-        <p:txBody>
-          <a:bodyPr wrap="square" anchor="t" lIns="0" rIns="0" tIns="0" bIns="0">
-            <a:spAutoFit/>
-          </a:bodyPr>
-          <a:lstStyle/>
-          <a:p>
-            <a:pPr algn="l">
-              <a:lnSpc>
-                <a:spcPct val="115000"/>
-              </a:lnSpc>
-            </a:pPr>
-            <a:r>
-              <a:rPr sz="1300" b="1" u="sng">
-                <a:solidFill>
-                  <a:srgbClr val="1D4ED8"/>
-                </a:solidFill>
-                <a:latin typeface="맑은 고딕"/>
-                <a:hlinkClick r:id="rId2"/>
-                <a:ea typeface="맑은 고딕"/>
-                <a:cs typeface="맑은 고딕"/>
-              </a:rPr>
-              <a:t>ChatGPT (OpenAI)</a:t>
-            </a:r>
-          </a:p>
-        </p:txBody>
-      </p:sp>
-      <p:sp>
-        <p:nvSpPr>
-          <p:cNvPr id="20" name="TextBox 19"/>
-          <p:cNvSpPr txBox="1"/>
-          <p:nvPr/>
-        </p:nvSpPr>
-        <p:spPr>
-          <a:xfrm>
-            <a:off x="3383280" y="4297680"/>
-            <a:ext cx="3017520" cy="502920"/>
-          </a:xfrm>
-          <a:prstGeom prst="rect">
-            <a:avLst/>
-          </a:prstGeom>
-          <a:noFill/>
-        </p:spPr>
-        <p:txBody>
-          <a:bodyPr wrap="square" anchor="t" lIns="0" rIns="0" tIns="0" bIns="0">
-            <a:spAutoFit/>
-          </a:bodyPr>
-          <a:lstStyle/>
-          <a:p>
-            <a:pPr algn="l">
-              <a:lnSpc>
-                <a:spcPct val="125000"/>
-              </a:lnSpc>
-            </a:pPr>
-            <a:r>
-              <a:rPr sz="1200" b="0">
-                <a:solidFill>
-                  <a:srgbClr val="3E4C59"/>
-                </a:solidFill>
-                <a:latin typeface="맑은 고딕"/>
-                <a:ea typeface="맑은 고딕"/>
-                <a:cs typeface="맑은 고딕"/>
-              </a:rPr>
-              <a:t>만 13세 미만 이용 불가.</a:t>
-            </a:r>
-          </a:p>
-          <a:p>
-            <a:pPr algn="l">
-              <a:lnSpc>
-                <a:spcPct val="125000"/>
-              </a:lnSpc>
-            </a:pPr>
-            <a:r>
-              <a:rPr sz="1200" b="0">
-                <a:solidFill>
-                  <a:srgbClr val="3E4C59"/>
-                </a:solidFill>
-                <a:latin typeface="맑은 고딕"/>
-                <a:ea typeface="맑은 고딕"/>
-                <a:cs typeface="맑은 고딕"/>
-              </a:rPr>
-              <a:t>13~18세는 보호자 동의 필요.</a:t>
-            </a:r>
-          </a:p>
-        </p:txBody>
-      </p:sp>
-      <p:sp>
-        <p:nvSpPr>
-          <p:cNvPr id="21" name="TextBox 20"/>
-          <p:cNvSpPr txBox="1"/>
-          <p:nvPr/>
-        </p:nvSpPr>
-        <p:spPr>
-          <a:xfrm>
-            <a:off x="6583679" y="4297680"/>
-            <a:ext cx="4480560" cy="502920"/>
-          </a:xfrm>
-          <a:prstGeom prst="rect">
-            <a:avLst/>
-          </a:prstGeom>
-          <a:noFill/>
-        </p:spPr>
-        <p:txBody>
-          <a:bodyPr wrap="square" anchor="t" lIns="0" rIns="0" tIns="0" bIns="0">
-            <a:spAutoFit/>
-          </a:bodyPr>
-          <a:lstStyle/>
-          <a:p>
-            <a:pPr algn="l">
-              <a:lnSpc>
-                <a:spcPct val="125000"/>
-              </a:lnSpc>
-            </a:pPr>
-            <a:r>
-              <a:rPr sz="1200" b="0">
-                <a:solidFill>
-                  <a:srgbClr val="3E4C59"/>
-                </a:solidFill>
-                <a:latin typeface="맑은 고딕"/>
-                <a:ea typeface="맑은 고딕"/>
-                <a:cs typeface="맑은 고딕"/>
-              </a:rPr>
-              <a:t>(13세 이상) 자녀 계정과 연결해</a:t>
-            </a:r>
-          </a:p>
-          <a:p>
-            <a:pPr algn="l">
-              <a:lnSpc>
-                <a:spcPct val="125000"/>
-              </a:lnSpc>
-            </a:pPr>
-            <a:r>
-              <a:rPr sz="1200" b="0">
-                <a:solidFill>
-                  <a:srgbClr val="3E4C59"/>
-                </a:solidFill>
-                <a:latin typeface="맑은 고딕"/>
-                <a:ea typeface="맑은 고딕"/>
-                <a:cs typeface="맑은 고딕"/>
-              </a:rPr>
-              <a:t>사용 금지 시간대·기능 제한, 대화 내용 열람은 불가</a:t>
-            </a:r>
-          </a:p>
-        </p:txBody>
-      </p:sp>
-      <p:sp>
-        <p:nvSpPr>
-          <p:cNvPr id="22" name="TextBox 21"/>
-          <p:cNvSpPr txBox="1"/>
-          <p:nvPr/>
-        </p:nvSpPr>
-        <p:spPr>
-          <a:xfrm>
-            <a:off x="1097280" y="4828031"/>
-            <a:ext cx="2194560" cy="274320"/>
-          </a:xfrm>
-          <a:prstGeom prst="rect">
-            <a:avLst/>
-          </a:prstGeom>
-          <a:noFill/>
-        </p:spPr>
-        <p:txBody>
-          <a:bodyPr wrap="square" anchor="t" lIns="0" rIns="0" tIns="0" bIns="0">
-            <a:spAutoFit/>
-          </a:bodyPr>
-          <a:lstStyle/>
-          <a:p>
-            <a:pPr algn="l">
-              <a:lnSpc>
-                <a:spcPct val="115000"/>
-              </a:lnSpc>
-            </a:pPr>
-            <a:r>
-              <a:rPr sz="1300" b="1" u="sng">
-                <a:solidFill>
-                  <a:srgbClr val="1D4ED8"/>
-                </a:solidFill>
-                <a:latin typeface="맑은 고딕"/>
-                <a:hlinkClick r:id="rId3"/>
-                <a:ea typeface="맑은 고딕"/>
-                <a:cs typeface="맑은 고딕"/>
-              </a:rPr>
-              <a:t>Gemini (Google)</a:t>
-            </a:r>
-          </a:p>
-        </p:txBody>
-      </p:sp>
-      <p:sp>
-        <p:nvSpPr>
-          <p:cNvPr id="23" name="TextBox 22"/>
-          <p:cNvSpPr txBox="1"/>
-          <p:nvPr/>
-        </p:nvSpPr>
-        <p:spPr>
-          <a:xfrm>
-            <a:off x="3383280" y="4773168"/>
-            <a:ext cx="3017520" cy="502920"/>
-          </a:xfrm>
-          <a:prstGeom prst="rect">
-            <a:avLst/>
-          </a:prstGeom>
-          <a:noFill/>
-        </p:spPr>
-        <p:txBody>
-          <a:bodyPr wrap="square" anchor="t" lIns="0" rIns="0" tIns="0" bIns="0">
-            <a:spAutoFit/>
-          </a:bodyPr>
-          <a:lstStyle/>
-          <a:p>
-            <a:pPr algn="l">
-              <a:lnSpc>
-                <a:spcPct val="125000"/>
-              </a:lnSpc>
-            </a:pPr>
-            <a:r>
-              <a:rPr sz="1200" b="0">
-                <a:solidFill>
-                  <a:srgbClr val="3E4C59"/>
-                </a:solidFill>
-                <a:latin typeface="맑은 고딕"/>
-                <a:ea typeface="맑은 고딕"/>
-                <a:cs typeface="맑은 고딕"/>
-              </a:rPr>
-              <a:t>만 13세 미만(국내 만 14세)은</a:t>
-            </a:r>
-          </a:p>
-          <a:p>
-            <a:pPr algn="l">
-              <a:lnSpc>
-                <a:spcPct val="125000"/>
-              </a:lnSpc>
-            </a:pPr>
-            <a:r>
-              <a:rPr sz="1200" b="0">
-                <a:solidFill>
-                  <a:srgbClr val="3E4C59"/>
-                </a:solidFill>
-                <a:latin typeface="맑은 고딕"/>
-                <a:ea typeface="맑은 고딕"/>
-                <a:cs typeface="맑은 고딕"/>
-              </a:rPr>
-              <a:t>보호자가 Family Link로 관리</a:t>
-            </a:r>
-          </a:p>
-        </p:txBody>
-      </p:sp>
-      <p:sp>
-        <p:nvSpPr>
-          <p:cNvPr id="24" name="TextBox 23"/>
-          <p:cNvSpPr txBox="1"/>
-          <p:nvPr/>
-        </p:nvSpPr>
-        <p:spPr>
-          <a:xfrm>
-            <a:off x="6583679" y="4773168"/>
-            <a:ext cx="4480560" cy="502920"/>
-          </a:xfrm>
-          <a:prstGeom prst="rect">
-            <a:avLst/>
-          </a:prstGeom>
-          <a:noFill/>
-        </p:spPr>
-        <p:txBody>
-          <a:bodyPr wrap="square" anchor="t" lIns="0" rIns="0" tIns="0" bIns="0">
-            <a:spAutoFit/>
-          </a:bodyPr>
-          <a:lstStyle/>
-          <a:p>
-            <a:pPr algn="l">
-              <a:lnSpc>
-                <a:spcPct val="125000"/>
-              </a:lnSpc>
-            </a:pPr>
-            <a:r>
-              <a:rPr sz="1200" b="0">
-                <a:solidFill>
-                  <a:srgbClr val="3E4C59"/>
-                </a:solidFill>
-                <a:latin typeface="맑은 고딕"/>
-                <a:ea typeface="맑은 고딕"/>
-                <a:cs typeface="맑은 고딕"/>
-              </a:rPr>
-              <a:t>Family Link에서 액세스를 켜고 끄기</a:t>
-            </a:r>
-          </a:p>
-        </p:txBody>
-      </p:sp>
-      <p:sp>
-        <p:nvSpPr>
-          <p:cNvPr id="25" name="Rounded Rectangle 24"/>
+              <a:t>가정에서 확인할 점</a:t>
+            </a:r>
+          </a:p>
+        </p:txBody>
+      </p:sp>
+      <p:sp>
+        <p:nvSpPr>
+          <p:cNvPr id="10" name="Rectangle 9"/>
           <p:cNvSpPr/>
           <p:nvPr/>
         </p:nvSpPr>
         <p:spPr>
           <a:xfrm>
-            <a:off x="777240" y="5376672"/>
-            <a:ext cx="10637215" cy="841248"/>
-          </a:xfrm>
-          <a:prstGeom prst="roundRect">
-            <a:avLst>
-              <a:gd name="adj" fmla="val 12000"/>
-            </a:avLst>
-          </a:prstGeom>
-          <a:solidFill>
-            <a:srgbClr val="E4F2F3"/>
-          </a:solidFill>
-          <a:ln>
-            <a:noFill/>
-          </a:ln>
-          <a:effectLst/>
-        </p:spPr>
-        <p:style>
-          <a:lnRef idx="1">
-            <a:schemeClr val="accent1"/>
-          </a:lnRef>
-          <a:fillRef idx="3">
-            <a:schemeClr val="accent1"/>
-          </a:fillRef>
-          <a:effectRef idx="2">
-            <a:schemeClr val="accent1"/>
-          </a:effectRef>
-          <a:fontRef idx="minor">
-            <a:schemeClr val="lt1"/>
-          </a:fontRef>
-        </p:style>
-        <p:txBody>
-          <a:bodyPr rtlCol="0" anchor="ctr" wrap="square"/>
-          <a:lstStyle/>
-          <a:p>
-            <a:pPr algn="ctr"/>
-          </a:p>
-        </p:txBody>
-      </p:sp>
-      <p:sp>
-        <p:nvSpPr>
-          <p:cNvPr id="26" name="TextBox 25"/>
-          <p:cNvSpPr txBox="1"/>
-          <p:nvPr/>
-        </p:nvSpPr>
-        <p:spPr>
-          <a:xfrm>
-            <a:off x="1143000" y="5550408"/>
-            <a:ext cx="9905695" cy="548640"/>
-          </a:xfrm>
-          <a:prstGeom prst="rect">
-            <a:avLst/>
-          </a:prstGeom>
-          <a:noFill/>
-        </p:spPr>
-        <p:txBody>
-          <a:bodyPr wrap="square" anchor="t" lIns="0" rIns="0" tIns="0" bIns="0">
-            <a:spAutoFit/>
-          </a:bodyPr>
-          <a:lstStyle/>
-          <a:p>
-            <a:pPr algn="l">
-              <a:lnSpc>
-                <a:spcPct val="135000"/>
-              </a:lnSpc>
-              <a:spcAft>
-                <a:spcPts val="300"/>
-              </a:spcAft>
-            </a:pPr>
-            <a:r>
-              <a:rPr sz="1350" b="1">
-                <a:solidFill>
-                  <a:srgbClr val="0E7C86"/>
-                </a:solidFill>
-                <a:latin typeface="맑은 고딕"/>
-                <a:ea typeface="맑은 고딕"/>
-                <a:cs typeface="맑은 고딕"/>
-              </a:rPr>
-              <a:t>국내에서는 만 14세 미만 아동의 서비스 가입에 보호자 동의가 필요합니다. 초등 단계는 동반 사용이 기본입니다.</a:t>
-            </a:r>
-          </a:p>
-          <a:p>
-            <a:pPr algn="l">
-              <a:lnSpc>
-                <a:spcPct val="135000"/>
-              </a:lnSpc>
-              <a:spcAft>
-                <a:spcPts val="300"/>
-              </a:spcAft>
-            </a:pPr>
-            <a:r>
-              <a:rPr sz="1350" b="0">
-                <a:solidFill>
-                  <a:srgbClr val="3E4C59"/>
-                </a:solidFill>
-                <a:latin typeface="맑은 고딕"/>
-                <a:ea typeface="맑은 고딕"/>
-                <a:cs typeface="맑은 고딕"/>
-              </a:rPr>
-              <a:t>연령·계정 정책은 자주 바뀝니다. 실제로 쓰실 서비스의 공식 약관과 도움말을 확인해 주세요.</a:t>
-            </a:r>
-          </a:p>
-        </p:txBody>
-      </p:sp>
-      <p:sp>
-        <p:nvSpPr>
-          <p:cNvPr id="27" name="Rectangle 26"/>
-          <p:cNvSpPr/>
-          <p:nvPr/>
-        </p:nvSpPr>
-        <p:spPr>
-          <a:xfrm>
-            <a:off x="0" y="6382512"/>
-            <a:ext cx="12191695" cy="10972"/>
+            <a:off x="6126479" y="2487168"/>
+            <a:ext cx="10972" cy="2615184"/>
           </a:xfrm>
           <a:prstGeom prst="rect">
             <a:avLst/>
@@ -12049,7 +11159,766 @@
       </p:sp>
       <p:sp>
         <p:nvSpPr>
-          <p:cNvPr id="28" name="TextBox 27"/>
+          <p:cNvPr id="11" name="TextBox 10"/>
+          <p:cNvSpPr txBox="1"/>
+          <p:nvPr/>
+        </p:nvSpPr>
+        <p:spPr>
+          <a:xfrm>
+            <a:off x="1097280" y="2606040"/>
+            <a:ext cx="4663440" cy="274320"/>
+          </a:xfrm>
+          <a:prstGeom prst="rect">
+            <a:avLst/>
+          </a:prstGeom>
+          <a:noFill/>
+        </p:spPr>
+        <p:txBody>
+          <a:bodyPr wrap="square" anchor="t" lIns="0" rIns="0" tIns="0" bIns="0">
+            <a:spAutoFit/>
+          </a:bodyPr>
+          <a:lstStyle/>
+          <a:p>
+            <a:pPr algn="l">
+              <a:lnSpc>
+                <a:spcPct val="115000"/>
+              </a:lnSpc>
+            </a:pPr>
+            <a:r>
+              <a:rPr sz="1350" b="1" u="sng">
+                <a:solidFill>
+                  <a:srgbClr val="1D4ED8"/>
+                </a:solidFill>
+                <a:latin typeface="맑은 고딕"/>
+                <a:hlinkClick r:id="rId2"/>
+                <a:ea typeface="맑은 고딕"/>
+                <a:cs typeface="맑은 고딕"/>
+              </a:rPr>
+              <a:t>ChatGPT (OpenAI)</a:t>
+            </a:r>
+          </a:p>
+        </p:txBody>
+      </p:sp>
+      <p:sp>
+        <p:nvSpPr>
+          <p:cNvPr id="12" name="TextBox 11"/>
+          <p:cNvSpPr txBox="1"/>
+          <p:nvPr/>
+        </p:nvSpPr>
+        <p:spPr>
+          <a:xfrm>
+            <a:off x="1097280" y="2871216"/>
+            <a:ext cx="4663440" cy="274320"/>
+          </a:xfrm>
+          <a:prstGeom prst="rect">
+            <a:avLst/>
+          </a:prstGeom>
+          <a:noFill/>
+        </p:spPr>
+        <p:txBody>
+          <a:bodyPr wrap="square" anchor="t" lIns="0" rIns="0" tIns="0" bIns="0">
+            <a:spAutoFit/>
+          </a:bodyPr>
+          <a:lstStyle/>
+          <a:p>
+            <a:pPr algn="l">
+              <a:lnSpc>
+                <a:spcPct val="115000"/>
+              </a:lnSpc>
+            </a:pPr>
+            <a:r>
+              <a:rPr sz="1200" b="0">
+                <a:solidFill>
+                  <a:srgbClr val="3E4C59"/>
+                </a:solidFill>
+                <a:latin typeface="맑은 고딕"/>
+                <a:ea typeface="맑은 고딕"/>
+                <a:cs typeface="맑은 고딕"/>
+              </a:rPr>
+              <a:t>약관상 만 13세 이상 (18세 미만은 보호자 동의)</a:t>
+            </a:r>
+          </a:p>
+        </p:txBody>
+      </p:sp>
+      <p:sp>
+        <p:nvSpPr>
+          <p:cNvPr id="13" name="TextBox 12"/>
+          <p:cNvSpPr txBox="1"/>
+          <p:nvPr/>
+        </p:nvSpPr>
+        <p:spPr>
+          <a:xfrm>
+            <a:off x="6400800" y="2706624"/>
+            <a:ext cx="4709160" cy="411480"/>
+          </a:xfrm>
+          <a:prstGeom prst="rect">
+            <a:avLst/>
+          </a:prstGeom>
+          <a:noFill/>
+        </p:spPr>
+        <p:txBody>
+          <a:bodyPr wrap="square" anchor="t" lIns="0" rIns="0" tIns="0" bIns="0">
+            <a:spAutoFit/>
+          </a:bodyPr>
+          <a:lstStyle/>
+          <a:p>
+            <a:pPr algn="l">
+              <a:lnSpc>
+                <a:spcPct val="125000"/>
+              </a:lnSpc>
+            </a:pPr>
+            <a:r>
+              <a:rPr sz="1300" b="0">
+                <a:solidFill>
+                  <a:srgbClr val="1F2933"/>
+                </a:solidFill>
+                <a:latin typeface="맑은 고딕"/>
+                <a:ea typeface="맑은 고딕"/>
+                <a:cs typeface="맑은 고딕"/>
+              </a:rPr>
+              <a:t>초등학생 본인 명의 가입은 원칙적으로 불가</a:t>
+            </a:r>
+          </a:p>
+        </p:txBody>
+      </p:sp>
+      <p:sp>
+        <p:nvSpPr>
+          <p:cNvPr id="14" name="Rectangle 13"/>
+          <p:cNvSpPr/>
+          <p:nvPr/>
+        </p:nvSpPr>
+        <p:spPr>
+          <a:xfrm>
+            <a:off x="960120" y="3140964"/>
+            <a:ext cx="10271455" cy="10972"/>
+          </a:xfrm>
+          <a:prstGeom prst="rect">
+            <a:avLst/>
+          </a:prstGeom>
+          <a:solidFill>
+            <a:srgbClr val="D9E0E8"/>
+          </a:solidFill>
+          <a:ln>
+            <a:noFill/>
+          </a:ln>
+          <a:effectLst/>
+        </p:spPr>
+        <p:style>
+          <a:lnRef idx="1">
+            <a:schemeClr val="accent1"/>
+          </a:lnRef>
+          <a:fillRef idx="3">
+            <a:schemeClr val="accent1"/>
+          </a:fillRef>
+          <a:effectRef idx="2">
+            <a:schemeClr val="accent1"/>
+          </a:effectRef>
+          <a:fontRef idx="minor">
+            <a:schemeClr val="lt1"/>
+          </a:fontRef>
+        </p:style>
+        <p:txBody>
+          <a:bodyPr rtlCol="0" anchor="ctr"/>
+          <a:lstStyle/>
+          <a:p>
+            <a:pPr algn="ctr"/>
+          </a:p>
+        </p:txBody>
+      </p:sp>
+      <p:sp>
+        <p:nvSpPr>
+          <p:cNvPr id="15" name="TextBox 14"/>
+          <p:cNvSpPr txBox="1"/>
+          <p:nvPr/>
+        </p:nvSpPr>
+        <p:spPr>
+          <a:xfrm>
+            <a:off x="1097280" y="3259836"/>
+            <a:ext cx="4663440" cy="274320"/>
+          </a:xfrm>
+          <a:prstGeom prst="rect">
+            <a:avLst/>
+          </a:prstGeom>
+          <a:noFill/>
+        </p:spPr>
+        <p:txBody>
+          <a:bodyPr wrap="square" anchor="t" lIns="0" rIns="0" tIns="0" bIns="0">
+            <a:spAutoFit/>
+          </a:bodyPr>
+          <a:lstStyle/>
+          <a:p>
+            <a:pPr algn="l">
+              <a:lnSpc>
+                <a:spcPct val="115000"/>
+              </a:lnSpc>
+            </a:pPr>
+            <a:r>
+              <a:rPr sz="1350" b="1" u="sng">
+                <a:solidFill>
+                  <a:srgbClr val="1D4ED8"/>
+                </a:solidFill>
+                <a:latin typeface="맑은 고딕"/>
+                <a:hlinkClick r:id="rId3"/>
+                <a:ea typeface="맑은 고딕"/>
+                <a:cs typeface="맑은 고딕"/>
+              </a:rPr>
+              <a:t>Gemini (Google)</a:t>
+            </a:r>
+          </a:p>
+        </p:txBody>
+      </p:sp>
+      <p:sp>
+        <p:nvSpPr>
+          <p:cNvPr id="16" name="TextBox 15"/>
+          <p:cNvSpPr txBox="1"/>
+          <p:nvPr/>
+        </p:nvSpPr>
+        <p:spPr>
+          <a:xfrm>
+            <a:off x="1097280" y="3525012"/>
+            <a:ext cx="4663440" cy="274320"/>
+          </a:xfrm>
+          <a:prstGeom prst="rect">
+            <a:avLst/>
+          </a:prstGeom>
+          <a:noFill/>
+        </p:spPr>
+        <p:txBody>
+          <a:bodyPr wrap="square" anchor="t" lIns="0" rIns="0" tIns="0" bIns="0">
+            <a:spAutoFit/>
+          </a:bodyPr>
+          <a:lstStyle/>
+          <a:p>
+            <a:pPr algn="l">
+              <a:lnSpc>
+                <a:spcPct val="115000"/>
+              </a:lnSpc>
+            </a:pPr>
+            <a:r>
+              <a:rPr sz="1200" b="0">
+                <a:solidFill>
+                  <a:srgbClr val="3E4C59"/>
+                </a:solidFill>
+                <a:latin typeface="맑은 고딕"/>
+                <a:ea typeface="맑은 고딕"/>
+                <a:cs typeface="맑은 고딕"/>
+              </a:rPr>
+              <a:t>만 13세 미만은 보호자가 Family Link로 관리</a:t>
+            </a:r>
+          </a:p>
+        </p:txBody>
+      </p:sp>
+      <p:sp>
+        <p:nvSpPr>
+          <p:cNvPr id="17" name="TextBox 16"/>
+          <p:cNvSpPr txBox="1"/>
+          <p:nvPr/>
+        </p:nvSpPr>
+        <p:spPr>
+          <a:xfrm>
+            <a:off x="6400800" y="3360420"/>
+            <a:ext cx="4709160" cy="411480"/>
+          </a:xfrm>
+          <a:prstGeom prst="rect">
+            <a:avLst/>
+          </a:prstGeom>
+          <a:noFill/>
+        </p:spPr>
+        <p:txBody>
+          <a:bodyPr wrap="square" anchor="t" lIns="0" rIns="0" tIns="0" bIns="0">
+            <a:spAutoFit/>
+          </a:bodyPr>
+          <a:lstStyle/>
+          <a:p>
+            <a:pPr algn="l">
+              <a:lnSpc>
+                <a:spcPct val="125000"/>
+              </a:lnSpc>
+            </a:pPr>
+            <a:r>
+              <a:rPr sz="1300" b="0">
+                <a:solidFill>
+                  <a:srgbClr val="1F2933"/>
+                </a:solidFill>
+                <a:latin typeface="맑은 고딕"/>
+                <a:ea typeface="맑은 고딕"/>
+                <a:cs typeface="맑은 고딕"/>
+              </a:rPr>
+              <a:t>부모 계정의 Family Link 설정이 먼저</a:t>
+            </a:r>
+          </a:p>
+        </p:txBody>
+      </p:sp>
+      <p:sp>
+        <p:nvSpPr>
+          <p:cNvPr id="18" name="Rectangle 17"/>
+          <p:cNvSpPr/>
+          <p:nvPr/>
+        </p:nvSpPr>
+        <p:spPr>
+          <a:xfrm>
+            <a:off x="960120" y="3794760"/>
+            <a:ext cx="10271455" cy="10972"/>
+          </a:xfrm>
+          <a:prstGeom prst="rect">
+            <a:avLst/>
+          </a:prstGeom>
+          <a:solidFill>
+            <a:srgbClr val="D9E0E8"/>
+          </a:solidFill>
+          <a:ln>
+            <a:noFill/>
+          </a:ln>
+          <a:effectLst/>
+        </p:spPr>
+        <p:style>
+          <a:lnRef idx="1">
+            <a:schemeClr val="accent1"/>
+          </a:lnRef>
+          <a:fillRef idx="3">
+            <a:schemeClr val="accent1"/>
+          </a:fillRef>
+          <a:effectRef idx="2">
+            <a:schemeClr val="accent1"/>
+          </a:effectRef>
+          <a:fontRef idx="minor">
+            <a:schemeClr val="lt1"/>
+          </a:fontRef>
+        </p:style>
+        <p:txBody>
+          <a:bodyPr rtlCol="0" anchor="ctr"/>
+          <a:lstStyle/>
+          <a:p>
+            <a:pPr algn="ctr"/>
+          </a:p>
+        </p:txBody>
+      </p:sp>
+      <p:sp>
+        <p:nvSpPr>
+          <p:cNvPr id="19" name="TextBox 18"/>
+          <p:cNvSpPr txBox="1"/>
+          <p:nvPr/>
+        </p:nvSpPr>
+        <p:spPr>
+          <a:xfrm>
+            <a:off x="1097280" y="3913632"/>
+            <a:ext cx="4663440" cy="274320"/>
+          </a:xfrm>
+          <a:prstGeom prst="rect">
+            <a:avLst/>
+          </a:prstGeom>
+          <a:noFill/>
+        </p:spPr>
+        <p:txBody>
+          <a:bodyPr wrap="square" anchor="t" lIns="0" rIns="0" tIns="0" bIns="0">
+            <a:spAutoFit/>
+          </a:bodyPr>
+          <a:lstStyle/>
+          <a:p>
+            <a:pPr algn="l">
+              <a:lnSpc>
+                <a:spcPct val="115000"/>
+              </a:lnSpc>
+            </a:pPr>
+            <a:r>
+              <a:rPr sz="1350" b="1" u="sng">
+                <a:solidFill>
+                  <a:srgbClr val="1D4ED8"/>
+                </a:solidFill>
+                <a:latin typeface="맑은 고딕"/>
+                <a:hlinkClick r:id="rId4"/>
+                <a:ea typeface="맑은 고딕"/>
+                <a:cs typeface="맑은 고딕"/>
+              </a:rPr>
+              <a:t>국내 개인정보 보호법</a:t>
+            </a:r>
+          </a:p>
+        </p:txBody>
+      </p:sp>
+      <p:sp>
+        <p:nvSpPr>
+          <p:cNvPr id="20" name="TextBox 19"/>
+          <p:cNvSpPr txBox="1"/>
+          <p:nvPr/>
+        </p:nvSpPr>
+        <p:spPr>
+          <a:xfrm>
+            <a:off x="1097280" y="4178808"/>
+            <a:ext cx="4663440" cy="274320"/>
+          </a:xfrm>
+          <a:prstGeom prst="rect">
+            <a:avLst/>
+          </a:prstGeom>
+          <a:noFill/>
+        </p:spPr>
+        <p:txBody>
+          <a:bodyPr wrap="square" anchor="t" lIns="0" rIns="0" tIns="0" bIns="0">
+            <a:spAutoFit/>
+          </a:bodyPr>
+          <a:lstStyle/>
+          <a:p>
+            <a:pPr algn="l">
+              <a:lnSpc>
+                <a:spcPct val="115000"/>
+              </a:lnSpc>
+            </a:pPr>
+            <a:r>
+              <a:rPr sz="1200" b="0">
+                <a:solidFill>
+                  <a:srgbClr val="3E4C59"/>
+                </a:solidFill>
+                <a:latin typeface="맑은 고딕"/>
+                <a:ea typeface="맑은 고딕"/>
+                <a:cs typeface="맑은 고딕"/>
+              </a:rPr>
+              <a:t>만 14세 미만은 보호자 동의 필수</a:t>
+            </a:r>
+          </a:p>
+        </p:txBody>
+      </p:sp>
+      <p:sp>
+        <p:nvSpPr>
+          <p:cNvPr id="21" name="TextBox 20"/>
+          <p:cNvSpPr txBox="1"/>
+          <p:nvPr/>
+        </p:nvSpPr>
+        <p:spPr>
+          <a:xfrm>
+            <a:off x="6400800" y="4014216"/>
+            <a:ext cx="4709160" cy="411480"/>
+          </a:xfrm>
+          <a:prstGeom prst="rect">
+            <a:avLst/>
+          </a:prstGeom>
+          <a:noFill/>
+        </p:spPr>
+        <p:txBody>
+          <a:bodyPr wrap="square" anchor="t" lIns="0" rIns="0" tIns="0" bIns="0">
+            <a:spAutoFit/>
+          </a:bodyPr>
+          <a:lstStyle/>
+          <a:p>
+            <a:pPr algn="l">
+              <a:lnSpc>
+                <a:spcPct val="125000"/>
+              </a:lnSpc>
+            </a:pPr>
+            <a:r>
+              <a:rPr sz="1300" b="0">
+                <a:solidFill>
+                  <a:srgbClr val="1F2933"/>
+                </a:solidFill>
+                <a:latin typeface="맑은 고딕"/>
+                <a:ea typeface="맑은 고딕"/>
+                <a:cs typeface="맑은 고딕"/>
+              </a:rPr>
+              <a:t>소셜 로그인도 개인정보 제3자 제공에 동의하는 것</a:t>
+            </a:r>
+          </a:p>
+        </p:txBody>
+      </p:sp>
+      <p:sp>
+        <p:nvSpPr>
+          <p:cNvPr id="22" name="Rectangle 21"/>
+          <p:cNvSpPr/>
+          <p:nvPr/>
+        </p:nvSpPr>
+        <p:spPr>
+          <a:xfrm>
+            <a:off x="960120" y="4448556"/>
+            <a:ext cx="10271455" cy="10972"/>
+          </a:xfrm>
+          <a:prstGeom prst="rect">
+            <a:avLst/>
+          </a:prstGeom>
+          <a:solidFill>
+            <a:srgbClr val="D9E0E8"/>
+          </a:solidFill>
+          <a:ln>
+            <a:noFill/>
+          </a:ln>
+          <a:effectLst/>
+        </p:spPr>
+        <p:style>
+          <a:lnRef idx="1">
+            <a:schemeClr val="accent1"/>
+          </a:lnRef>
+          <a:fillRef idx="3">
+            <a:schemeClr val="accent1"/>
+          </a:fillRef>
+          <a:effectRef idx="2">
+            <a:schemeClr val="accent1"/>
+          </a:effectRef>
+          <a:fontRef idx="minor">
+            <a:schemeClr val="lt1"/>
+          </a:fontRef>
+        </p:style>
+        <p:txBody>
+          <a:bodyPr rtlCol="0" anchor="ctr"/>
+          <a:lstStyle/>
+          <a:p>
+            <a:pPr algn="ctr"/>
+          </a:p>
+        </p:txBody>
+      </p:sp>
+      <p:sp>
+        <p:nvSpPr>
+          <p:cNvPr id="23" name="TextBox 22"/>
+          <p:cNvSpPr txBox="1"/>
+          <p:nvPr/>
+        </p:nvSpPr>
+        <p:spPr>
+          <a:xfrm>
+            <a:off x="1097280" y="4567428"/>
+            <a:ext cx="4663440" cy="274320"/>
+          </a:xfrm>
+          <a:prstGeom prst="rect">
+            <a:avLst/>
+          </a:prstGeom>
+          <a:noFill/>
+        </p:spPr>
+        <p:txBody>
+          <a:bodyPr wrap="square" anchor="t" lIns="0" rIns="0" tIns="0" bIns="0">
+            <a:spAutoFit/>
+          </a:bodyPr>
+          <a:lstStyle/>
+          <a:p>
+            <a:pPr algn="l">
+              <a:lnSpc>
+                <a:spcPct val="115000"/>
+              </a:lnSpc>
+            </a:pPr>
+            <a:r>
+              <a:rPr sz="1350" b="1" u="sng">
+                <a:solidFill>
+                  <a:srgbClr val="1D4ED8"/>
+                </a:solidFill>
+                <a:latin typeface="맑은 고딕"/>
+                <a:hlinkClick r:id="rId5"/>
+                <a:ea typeface="맑은 고딕"/>
+                <a:cs typeface="맑은 고딕"/>
+              </a:rPr>
+              <a:t>서울시교육청 지침</a:t>
+            </a:r>
+          </a:p>
+        </p:txBody>
+      </p:sp>
+      <p:sp>
+        <p:nvSpPr>
+          <p:cNvPr id="24" name="TextBox 23"/>
+          <p:cNvSpPr txBox="1"/>
+          <p:nvPr/>
+        </p:nvSpPr>
+        <p:spPr>
+          <a:xfrm>
+            <a:off x="1097280" y="4832604"/>
+            <a:ext cx="4663440" cy="274320"/>
+          </a:xfrm>
+          <a:prstGeom prst="rect">
+            <a:avLst/>
+          </a:prstGeom>
+          <a:noFill/>
+        </p:spPr>
+        <p:txBody>
+          <a:bodyPr wrap="square" anchor="t" lIns="0" rIns="0" tIns="0" bIns="0">
+            <a:spAutoFit/>
+          </a:bodyPr>
+          <a:lstStyle/>
+          <a:p>
+            <a:pPr algn="l">
+              <a:lnSpc>
+                <a:spcPct val="115000"/>
+              </a:lnSpc>
+            </a:pPr>
+            <a:r>
+              <a:rPr sz="1200" b="0">
+                <a:solidFill>
+                  <a:srgbClr val="3E4C59"/>
+                </a:solidFill>
+                <a:latin typeface="맑은 고딕"/>
+                <a:ea typeface="맑은 고딕"/>
+                <a:cs typeface="맑은 고딕"/>
+              </a:rPr>
+              <a:t>초등은 교사 시연을 통한 간접 체험이 원칙</a:t>
+            </a:r>
+          </a:p>
+        </p:txBody>
+      </p:sp>
+      <p:sp>
+        <p:nvSpPr>
+          <p:cNvPr id="25" name="TextBox 24"/>
+          <p:cNvSpPr txBox="1"/>
+          <p:nvPr/>
+        </p:nvSpPr>
+        <p:spPr>
+          <a:xfrm>
+            <a:off x="6400800" y="4668012"/>
+            <a:ext cx="4709160" cy="411480"/>
+          </a:xfrm>
+          <a:prstGeom prst="rect">
+            <a:avLst/>
+          </a:prstGeom>
+          <a:noFill/>
+        </p:spPr>
+        <p:txBody>
+          <a:bodyPr wrap="square" anchor="t" lIns="0" rIns="0" tIns="0" bIns="0">
+            <a:spAutoFit/>
+          </a:bodyPr>
+          <a:lstStyle/>
+          <a:p>
+            <a:pPr algn="l">
+              <a:lnSpc>
+                <a:spcPct val="125000"/>
+              </a:lnSpc>
+            </a:pPr>
+            <a:r>
+              <a:rPr sz="1300" b="0">
+                <a:solidFill>
+                  <a:srgbClr val="1F2933"/>
+                </a:solidFill>
+                <a:latin typeface="맑은 고딕"/>
+                <a:ea typeface="맑은 고딕"/>
+                <a:cs typeface="맑은 고딕"/>
+              </a:rPr>
+              <a:t>학교에서 쓸 때는 가정통신문 동의 절차 확인</a:t>
+            </a:r>
+          </a:p>
+        </p:txBody>
+      </p:sp>
+      <p:sp>
+        <p:nvSpPr>
+          <p:cNvPr id="26" name="Rounded Rectangle 25"/>
+          <p:cNvSpPr/>
+          <p:nvPr/>
+        </p:nvSpPr>
+        <p:spPr>
+          <a:xfrm>
+            <a:off x="777240" y="5321808"/>
+            <a:ext cx="10637215" cy="749808"/>
+          </a:xfrm>
+          <a:prstGeom prst="roundRect">
+            <a:avLst>
+              <a:gd name="adj" fmla="val 10000"/>
+            </a:avLst>
+          </a:prstGeom>
+          <a:solidFill>
+            <a:srgbClr val="1F2933"/>
+          </a:solidFill>
+          <a:ln>
+            <a:noFill/>
+          </a:ln>
+          <a:effectLst/>
+        </p:spPr>
+        <p:style>
+          <a:lnRef idx="1">
+            <a:schemeClr val="accent1"/>
+          </a:lnRef>
+          <a:fillRef idx="3">
+            <a:schemeClr val="accent1"/>
+          </a:fillRef>
+          <a:effectRef idx="2">
+            <a:schemeClr val="accent1"/>
+          </a:effectRef>
+          <a:fontRef idx="minor">
+            <a:schemeClr val="lt1"/>
+          </a:fontRef>
+        </p:style>
+        <p:txBody>
+          <a:bodyPr rtlCol="0" anchor="ctr" wrap="square"/>
+          <a:lstStyle/>
+          <a:p>
+            <a:pPr algn="ctr"/>
+          </a:p>
+        </p:txBody>
+      </p:sp>
+      <p:sp>
+        <p:nvSpPr>
+          <p:cNvPr id="27" name="TextBox 26"/>
+          <p:cNvSpPr txBox="1"/>
+          <p:nvPr/>
+        </p:nvSpPr>
+        <p:spPr>
+          <a:xfrm>
+            <a:off x="777240" y="5541264"/>
+            <a:ext cx="10637215" cy="365760"/>
+          </a:xfrm>
+          <a:prstGeom prst="rect">
+            <a:avLst/>
+          </a:prstGeom>
+          <a:noFill/>
+        </p:spPr>
+        <p:txBody>
+          <a:bodyPr wrap="square" anchor="t" lIns="0" rIns="0" tIns="0" bIns="0">
+            <a:spAutoFit/>
+          </a:bodyPr>
+          <a:lstStyle/>
+          <a:p>
+            <a:pPr algn="ctr">
+              <a:lnSpc>
+                <a:spcPct val="115000"/>
+              </a:lnSpc>
+            </a:pPr>
+            <a:r>
+              <a:rPr sz="1800" b="1">
+                <a:solidFill>
+                  <a:srgbClr val="FFFFFF"/>
+                </a:solidFill>
+                <a:latin typeface="맑은 고딕"/>
+                <a:ea typeface="맑은 고딕"/>
+                <a:cs typeface="맑은 고딕"/>
+              </a:rPr>
+              <a:t>초등학생이 쓰는 모든 계정은 ‘부모 계정’이어야 합니다.</a:t>
+            </a:r>
+          </a:p>
+        </p:txBody>
+      </p:sp>
+      <p:sp>
+        <p:nvSpPr>
+          <p:cNvPr id="28" name="Rectangle 27"/>
+          <p:cNvSpPr/>
+          <p:nvPr/>
+        </p:nvSpPr>
+        <p:spPr>
+          <a:xfrm>
+            <a:off x="0" y="6382512"/>
+            <a:ext cx="12191695" cy="10972"/>
+          </a:xfrm>
+          <a:prstGeom prst="rect">
+            <a:avLst/>
+          </a:prstGeom>
+          <a:solidFill>
+            <a:srgbClr val="D9E0E8"/>
+          </a:solidFill>
+          <a:ln>
+            <a:noFill/>
+          </a:ln>
+          <a:effectLst/>
+        </p:spPr>
+        <p:style>
+          <a:lnRef idx="1">
+            <a:schemeClr val="accent1"/>
+          </a:lnRef>
+          <a:fillRef idx="3">
+            <a:schemeClr val="accent1"/>
+          </a:fillRef>
+          <a:effectRef idx="2">
+            <a:schemeClr val="accent1"/>
+          </a:effectRef>
+          <a:fontRef idx="minor">
+            <a:schemeClr val="lt1"/>
+          </a:fontRef>
+        </p:style>
+        <p:txBody>
+          <a:bodyPr rtlCol="0" anchor="ctr"/>
+          <a:lstStyle/>
+          <a:p>
+            <a:pPr algn="ctr"/>
+          </a:p>
+        </p:txBody>
+      </p:sp>
+      <p:sp>
+        <p:nvSpPr>
+          <p:cNvPr id="29" name="TextBox 28"/>
           <p:cNvSpPr txBox="1"/>
           <p:nvPr/>
         </p:nvSpPr>
@@ -12075,23 +11944,22 @@
               </a:lnSpc>
             </a:pPr>
             <a:r>
-              <a:rPr sz="950" b="0" u="sng">
-                <a:solidFill>
-                  <a:srgbClr val="1D4ED8"/>
-                </a:solidFill>
-                <a:latin typeface="맑은 고딕"/>
-                <a:hlinkClick r:id="rId4"/>
-                <a:ea typeface="맑은 고딕"/>
-                <a:cs typeface="맑은 고딕"/>
-              </a:rPr>
-              <a:t>출처: OpenAI 고객센터·이용약관, Google Gemini/Family Link 고객센터 (2026년 9월 확인 기준) · 개인정보 보호법 제22조의2(아동의 개인정보 보호)</a:t>
-            </a:r>
-          </a:p>
-        </p:txBody>
-      </p:sp>
-      <p:sp>
-        <p:nvSpPr>
-          <p:cNvPr id="29" name="TextBox 28"/>
+              <a:rPr sz="950" b="0">
+                <a:solidFill>
+                  <a:srgbClr val="7B8894"/>
+                </a:solidFill>
+                <a:latin typeface="맑은 고딕"/>
+                <a:ea typeface="맑은 고딕"/>
+                <a:cs typeface="맑은 고딕"/>
+              </a:rPr>
+              <a:t>출처: 각 항목의 공식 약관·법령·교육청 지침 (2026년 9월 확인 기준) · 기준 이름을 누르면 원문으로 이동합니다</a:t>
+            </a:r>
+          </a:p>
+        </p:txBody>
+      </p:sp>
+      <p:sp>
+        <p:nvSpPr>
+          <p:cNvPr id="30" name="TextBox 29"/>
           <p:cNvSpPr txBox="1"/>
           <p:nvPr/>
         </p:nvSpPr>
@@ -12310,7 +12178,7 @@
                 <a:ea typeface="맑은 고딕"/>
                 <a:cs typeface="맑은 고딕"/>
               </a:rPr>
-              <a:t>초등학생이 직접 가입할 수 있는 범용 AI 챗봇은 사실상 없습니다.</a:t>
+              <a:t>그렇다면 실제로 쓸 수 있는 건 무엇인지 하나씩 보겠습니다.</a:t>
             </a:r>
           </a:p>
         </p:txBody>

--- a/parent-ai-training/AI시대_학부모연수_20260917.pptx
+++ b/parent-ai-training/AI시대_학부모연수_20260917.pptx
@@ -622,7 +622,7 @@
                 <a:ea typeface="맑은 고딕"/>
                 <a:cs typeface="맑은 고딕"/>
               </a:rPr>
-              <a:t>이 네 가지는 집에서 5분이면 확인할 수 있습니다. 실제로 틀린 답을 하나 같이 찾아보는 것이 가장 빠른 방법입니다(24장 활동과 연결).</a:t>
+              <a:t>이 네 가지는 집에서 5분이면 확인할 수 있습니다. 실제로 틀린 답을 하나 같이 찾아보는 것이 가장 빠른 방법입니다(29장 활동과 연결).</a:t>
             </a:r>
           </a:p>
           <a:p>
@@ -1177,7 +1177,7 @@
                 <a:ea typeface="맑은 고딕"/>
                 <a:cs typeface="맑은 고딕"/>
               </a:rPr>
-              <a:t>이 장은 제미나이를 권하는 자리가 아닙니다. 허용하기로 이미 정한 가정을 위한 안내라는 점을 한 번 짚어 주십시오. 29장 ‘우리 집 AI 사용 약속’에서 이 세 가지를 그대로 씁니다.</a:t>
+              <a:t>이 장은 제미나이를 권하는 자리가 아닙니다. 허용하기로 이미 정한 가정을 위한 안내라는 점을 한 번 짚어 주십시오. 39장 ‘우리 집 AI 사용 약속’에서 이 세 가지를 그대로 씁니다.</a:t>
             </a:r>
           </a:p>
         </p:txBody>
@@ -1252,7 +1252,7 @@
                 <a:ea typeface="맑은 고딕"/>
                 <a:cs typeface="맑은 고딕"/>
               </a:rPr>
-              <a:t>신호등은 냉장고에 붙여 두기 좋은 형태입니다. 28장에서 각 가정이 직접 채웁니다.</a:t>
+              <a:t>신호등은 냉장고에 붙여 두기 좋은 형태입니다. 39장에서 각 가정이 직접 채웁니다.</a:t>
             </a:r>
           </a:p>
           <a:p>
@@ -1507,7 +1507,37 @@
                 <a:ea typeface="맑은 고딕"/>
                 <a:cs typeface="맑은 고딕"/>
               </a:rPr>
-              <a:t>앞 장에서 ‘책은 맥락을 읽는다’고 했던 것의 근거입니다.\n이 메타분석은 2000~2017년에 발표된 연구들을 모아, 같은 글을 종이와 디지털 기기로 읽었을 때를 비교했습니다. 연구 설계와 관계없이 종이로 읽을 때 학습 효과가 더 컸습니다. 논문 제목이 ‘Don’t throw away your printed books(인쇄된 책을 버리지 마세요)’입니다.\n해석의 주의: ①대부분 성인·청소년 대상 연구이므로 초등학생에게 그대로 적용하기는 어렵습니다. ②디지털 읽기가 쓸모없다는 뜻이 아니라, 깊이 읽어야 하는 글에서 차이가 난다는 뜻입니다. ③2017년까지의 연구라는 점도 함께 말해 주십시오.\n가정에서 할 일 한 가지로 정리하면: 숙제로 읽어야 하는 긴 글은 인쇄해서 읽히거나 책으로 읽히기. 짧은 검색은 화면으로 해도 괜찮습니다.</a:t>
+              <a:t>앞 장에서 ‘책은 맥락을 읽는다’고 했던 것의 근거입니다.</a:t>
+            </a:r>
+          </a:p>
+          <a:p>
+            <a:r>
+              <a:rPr sz="1100">
+                <a:latin typeface="맑은 고딕"/>
+                <a:ea typeface="맑은 고딕"/>
+                <a:cs typeface="맑은 고딕"/>
+              </a:rPr>
+              <a:t>이 메타분석은 2000~2017년에 발표된 연구들을 모아, 같은 글을 종이와 디지털 기기로 읽었을 때를 비교했습니다. 연구 설계와 관계없이 종이로 읽을 때 학습 효과가 더 컸습니다. 논문 제목이 ‘Don’t throw away your printed books(인쇄된 책을 버리지 마세요)’입니다.</a:t>
+            </a:r>
+          </a:p>
+          <a:p>
+            <a:r>
+              <a:rPr sz="1100">
+                <a:latin typeface="맑은 고딕"/>
+                <a:ea typeface="맑은 고딕"/>
+                <a:cs typeface="맑은 고딕"/>
+              </a:rPr>
+              <a:t>해석의 주의: ①대부분 성인·청소년 대상 연구이므로 초등학생에게 그대로 적용하기는 어렵습니다. ②디지털 읽기가 쓸모없다는 뜻이 아니라, 깊이 읽어야 하는 글에서 차이가 난다는 뜻입니다. ③2017년까지의 연구라는 점도 함께 말해 주십시오.</a:t>
+            </a:r>
+          </a:p>
+          <a:p>
+            <a:r>
+              <a:rPr sz="1100">
+                <a:latin typeface="맑은 고딕"/>
+                <a:ea typeface="맑은 고딕"/>
+                <a:cs typeface="맑은 고딕"/>
+              </a:rPr>
+              <a:t>가정에서 할 일 한 가지로 정리하면: 숙제로 읽어야 하는 긴 글은 인쇄해서 읽히거나 책으로 읽히기. 짧은 검색은 화면으로 해도 괜찮습니다.</a:t>
             </a:r>
           </a:p>
         </p:txBody>
@@ -1582,7 +1612,7 @@
                 <a:ea typeface="맑은 고딕"/>
                 <a:cs typeface="맑은 고딕"/>
               </a:rPr>
-              <a:t>네 가지를 읽어 주고 손을 들게 합니다. 가장 많이 나온 항목을 기억해 두었다가 해당 구간(숙제=17~21장, 사실 확인=23~24장, 시작 나이=9~13장)에서 다시 언급하면 몰입도가 올라갑니다.</a:t>
+              <a:t>네 가지를 읽어 주고 손을 들게 합니다. 가장 많이 나온 항목을 기억해 두었다가 해당 구간(숙제=21~25장, 사실 확인=28~29장, 시작 나이=9~15장)에서 다시 언급하면 몰입도가 올라갑니다.</a:t>
             </a:r>
           </a:p>
           <a:p>
@@ -1667,7 +1697,47 @@
                 <a:ea typeface="맑은 고딕"/>
                 <a:cs typeface="맑은 고딕"/>
               </a:rPr>
-              <a:t>‘기기를 쓰게 할까 말까’라는 이분법을 깨는 장입니다.\nPISA 2022에서 OECD 평균 59%의 학생이 수학 수업에서 다른 학생의 휴대폰·태블릿·노트북 사용 때문에 주의가 흐트러진 적이 있다고 답했습니다. 매 수업 또는 대부분의 수업에서 방해받는다고 답한 학생은 그렇지 않은 학생보다 수학 점수가 15점 낮았습니다. PISA에서 15세 학생의 연간 학습량이 약 20점이므로, 15점은 약 4분의 3년치에 해당합니다.\n반대쪽 결과도 꼭 같이 전해 주세요. 학교에서 학습 목적으로 하루 1시간 이하 사용한 학생은 전혀 쓰지 않은 학생보다 14점 높았습니다. 반면 여가 목적으로 하루 1시간을 넘기면 점수가 크게 떨어졌습니다.\n해석의 주의: 만 15세 대상이고, 인과관계가 아니라 상관관계를 보여 주는 자료입니다. ‘공부 잘하는 학생이 기기를 적게 쓴다’는 반대 방향의 설명도 가능하다는 점을 짚어 주시면 좋습니다.\n16장 신호등의 ‘노랑’ 기준이 왜 시간이 아니라 용도인지가 여기서 설명됩니다.</a:t>
+              <a:t>‘기기를 쓰게 할까 말까’라는 이분법을 깨는 장입니다.</a:t>
+            </a:r>
+          </a:p>
+          <a:p>
+            <a:r>
+              <a:rPr sz="1100">
+                <a:latin typeface="맑은 고딕"/>
+                <a:ea typeface="맑은 고딕"/>
+                <a:cs typeface="맑은 고딕"/>
+              </a:rPr>
+              <a:t>PISA 2022에서 OECD 평균 59%의 학생이 수학 수업에서 다른 학생의 휴대폰·태블릿·노트북 사용 때문에 주의가 흐트러진 적이 있다고 답했습니다. 매 수업 또는 대부분의 수업에서 방해받는다고 답한 학생은 그렇지 않은 학생보다 수학 점수가 15점 낮았습니다. PISA에서 15세 학생의 연간 학습량이 약 20점이므로, 15점은 약 4분의 3년치에 해당합니다.</a:t>
+            </a:r>
+          </a:p>
+          <a:p>
+            <a:r>
+              <a:rPr sz="1100">
+                <a:latin typeface="맑은 고딕"/>
+                <a:ea typeface="맑은 고딕"/>
+                <a:cs typeface="맑은 고딕"/>
+              </a:rPr>
+              <a:t>반대쪽 결과도 꼭 같이 전해 주세요. 학교에서 학습 목적으로 하루 1시간 이하 사용한 학생은 전혀 쓰지 않은 학생보다 14점 높았습니다. 반면 여가 목적으로 하루 1시간을 넘기면 점수가 크게 떨어졌습니다.</a:t>
+            </a:r>
+          </a:p>
+          <a:p>
+            <a:r>
+              <a:rPr sz="1100">
+                <a:latin typeface="맑은 고딕"/>
+                <a:ea typeface="맑은 고딕"/>
+                <a:cs typeface="맑은 고딕"/>
+              </a:rPr>
+              <a:t>해석의 주의: 만 15세 대상이고, 인과관계가 아니라 상관관계를 보여 주는 자료입니다. ‘공부 잘하는 학생이 기기를 적게 쓴다’는 반대 방향의 설명도 가능하다는 점을 짚어 주시면 좋습니다.</a:t>
+            </a:r>
+          </a:p>
+          <a:p>
+            <a:r>
+              <a:rPr sz="1100">
+                <a:latin typeface="맑은 고딕"/>
+                <a:ea typeface="맑은 고딕"/>
+                <a:cs typeface="맑은 고딕"/>
+              </a:rPr>
+              <a:t>16장 신호등의 ‘노랑’ 기준이 왜 시간이 아니라 용도인지가 여기서 설명됩니다.</a:t>
             </a:r>
           </a:p>
         </p:txBody>
@@ -2142,7 +2212,7 @@
                 <a:ea typeface="맑은 고딕"/>
                 <a:cs typeface="맑은 고딕"/>
               </a:rPr>
-              <a:t>주의: 좋은 질문은 답을 유용하게 만들지만 정확성을 보장하지는 않습니다. 이 점은 23장에서 이어집니다.</a:t>
+              <a:t>주의: 좋은 공식이 답을 유용하게 만들어 주지만 정확성까지 보장하지는 않습니다. 28장에서 이어집니다.</a:t>
             </a:r>
           </a:p>
         </p:txBody>
@@ -2217,7 +2287,37 @@
                 <a:ea typeface="맑은 고딕"/>
                 <a:cs typeface="맑은 고딕"/>
               </a:rPr>
-              <a:t>다음 장 ‘틈만 나면 AI를 찾는 아이에게’로 넘어가기 전에 배경을 깔아 주는 장입니다.\n2024년 조사에서 청소년(만 10~19세) 42.6%, 유아동(만 3~9세) 25.9%가 스마트폰 과의존 위험군(고위험군 + 잠재적위험군)으로 나타났습니다. 두 연령대 모두 전년보다 올랐고, 성인과 60대는 오히려 줄었습니다.\n‘위험군’이라는 말이 무겁게 들릴 수 있으니 설명을 덧붙여 주세요. 고위험군과 잠재적위험군을 합한 수치이며, 대부분은 잠재적위험군입니다. 진단이 아니라 조사 분류라는 점을 말해 주시면 학부모의 불안이 과해지지 않습니다.\n연결 문장: AI 사용 시간을 따로 정하려 하지 마시고, 이미 있는 스마트폰 규칙 안에 넣으시는 편이 지켜집니다. 29장 ‘우리 집 AI 사용 약속’을 쓸 때 이 점을 다시 짚어 주세요.</a:t>
+              <a:t>다음 장 ‘틈만 나면 AI를 찾는 아이에게’로 넘어가기 전에 배경을 깔아 주는 장입니다.</a:t>
+            </a:r>
+          </a:p>
+          <a:p>
+            <a:r>
+              <a:rPr sz="1100">
+                <a:latin typeface="맑은 고딕"/>
+                <a:ea typeface="맑은 고딕"/>
+                <a:cs typeface="맑은 고딕"/>
+              </a:rPr>
+              <a:t>2024년 조사에서 청소년(만 10~19세) 42.6%, 유아동(만 3~9세) 25.9%가 스마트폰 과의존 위험군(고위험군 + 잠재적위험군)으로 나타났습니다. 두 연령대 모두 전년보다 올랐고, 성인과 60대는 오히려 줄었습니다.</a:t>
+            </a:r>
+          </a:p>
+          <a:p>
+            <a:r>
+              <a:rPr sz="1100">
+                <a:latin typeface="맑은 고딕"/>
+                <a:ea typeface="맑은 고딕"/>
+                <a:cs typeface="맑은 고딕"/>
+              </a:rPr>
+              <a:t>‘위험군’이라는 말이 무겁게 들릴 수 있으니 설명을 덧붙여 주세요. 고위험군과 잠재적위험군을 합한 수치이며, 대부분은 잠재적위험군입니다. 진단이 아니라 조사 분류라는 점을 말해 주시면 학부모의 불안이 과해지지 않습니다.</a:t>
+            </a:r>
+          </a:p>
+          <a:p>
+            <a:r>
+              <a:rPr sz="1100">
+                <a:latin typeface="맑은 고딕"/>
+                <a:ea typeface="맑은 고딕"/>
+                <a:cs typeface="맑은 고딕"/>
+              </a:rPr>
+              <a:t>연결 문장: AI 사용 시간을 따로 정하려 하지 마시고, 이미 있는 스마트폰 규칙 안에 넣으시는 편이 지켜집니다. 39장 ‘우리 집 AI 사용 약속’을 쓸 때 이 점을 다시 짚어 주세요.</a:t>
             </a:r>
           </a:p>
         </p:txBody>
@@ -2747,7 +2847,47 @@
                 <a:ea typeface="맑은 고딕"/>
                 <a:cs typeface="맑은 고딕"/>
               </a:rPr>
-              <a:t>AI 이야기를 걱정으로만 듣던 학부모의 표정이 바뀌는 장입니다.\n태국에는 검진이 필요한 당뇨병 환자가 약 500만 명인데 안과 전문의는 약 1,400명뿐입니다. 한 사람이 수천 명을 봐야 하는 구조라 검진을 받지 못한 채 실명하는 경우가 많았습니다. 구글이 라자위티병원과 함께 안저 사진을 AI가 분석하는 검진을 도입했고, 90% 이상의 정확도로 위험군을 가려내고 있습니다.\n핵심 메시지: AI가 의사를 대신한 것이 아니라, 의사가 없는 자리를 메웠습니다. ‘AI가 사람 일자리를 뺏는다’는 단순한 구도와 다른 사례라는 점을 짚어 주세요.\n해석의 주의: 실제 진료 현장에서는 사진 화질이나 인터넷 속도 때문에 어려움도 보고되었습니다. 완성된 기술이라기보다 진행 중인 시도로 소개해 주십시오.\n아이에게 건넬 질문: ‘너라면 AI로 어떤 문제를 풀어 보고 싶어?’</a:t>
+              <a:t>AI 이야기를 걱정으로만 듣던 학부모의 표정이 바뀌는 장입니다.</a:t>
+            </a:r>
+          </a:p>
+          <a:p>
+            <a:r>
+              <a:rPr sz="1100">
+                <a:latin typeface="맑은 고딕"/>
+                <a:ea typeface="맑은 고딕"/>
+                <a:cs typeface="맑은 고딕"/>
+              </a:rPr>
+              <a:t>태국에는 검진이 필요한 당뇨병 환자가 약 500만 명인데 안과 전문의는 약 1,400명뿐입니다. 한 사람이 수천 명을 봐야 하는 구조라 검진을 받지 못한 채 실명하는 경우가 많았습니다. 구글이 라자위티병원과 함께 안저 사진을 AI가 분석하는 검진을 도입했고, 90% 이상의 정확도로 위험군을 가려내고 있습니다.</a:t>
+            </a:r>
+          </a:p>
+          <a:p>
+            <a:r>
+              <a:rPr sz="1100">
+                <a:latin typeface="맑은 고딕"/>
+                <a:ea typeface="맑은 고딕"/>
+                <a:cs typeface="맑은 고딕"/>
+              </a:rPr>
+              <a:t>핵심 메시지: AI가 의사를 대신한 것이 아니라, 의사가 없는 자리를 메웠습니다. ‘AI가 사람 일자리를 뺏는다’는 단순한 구도와 다른 사례라는 점을 짚어 주세요.</a:t>
+            </a:r>
+          </a:p>
+          <a:p>
+            <a:r>
+              <a:rPr sz="1100">
+                <a:latin typeface="맑은 고딕"/>
+                <a:ea typeface="맑은 고딕"/>
+                <a:cs typeface="맑은 고딕"/>
+              </a:rPr>
+              <a:t>해석의 주의: 실제 진료 현장에서는 사진 화질이나 인터넷 속도 때문에 어려움도 보고되었습니다. 완성된 기술이라기보다 진행 중인 시도로 소개해 주십시오.</a:t>
+            </a:r>
+          </a:p>
+          <a:p>
+            <a:r>
+              <a:rPr sz="1100">
+                <a:latin typeface="맑은 고딕"/>
+                <a:ea typeface="맑은 고딕"/>
+                <a:cs typeface="맑은 고딕"/>
+              </a:rPr>
+              <a:t>아이에게 건넬 질문: ‘너라면 AI로 어떤 문제를 풀어 보고 싶어?’</a:t>
             </a:r>
           </a:p>
         </p:txBody>
@@ -2822,7 +2962,47 @@
                 <a:ea typeface="맑은 고딕"/>
                 <a:cs typeface="맑은 고딕"/>
               </a:rPr>
-              <a:t>앞 장의 태국 사례가 하나의 예였다면, 이 장은 그런 시도가 모여 있는 흐름을 보여 줍니다.\nAI for Good은 2017년 유엔 산하 국제전기통신연합(ITU)이 시작했고, 빈곤·기아·보건·교육·환경 같은 지구적 과제에 AI를 쓰자는 플랫폼입니다. 매년 제네바에서 총회가 열리고 150개국 넘게 참여합니다.\n사례를 하나씩 짚어 주세요. 홍수 예측은 대피 시간을 벌어 주고, 위성 영상 분석은 재난을 몇 분 만에 감지합니다. 알파폴드가 밝힌 단백질 구조는 공개되어 신약 연구에 쓰이고 있습니다.\n가장 중요한 것은 맨 아래 문장입니다. 오늘 연수에서 부모가 아이에게 건넬 수 있는 가장 좋은 질문이 ‘이걸로 누구를 도울 수 있을까’입니다. 성능이나 점수가 아니라 쓰임을 묻는 질문이고, 이것이 30장 다섯 가지 역량과 41장 마무리로 이어집니다.\n시간이 부족하면 이 장은 사례 하나만 말하고 아래 문장으로 바로 넘어가셔도 됩니다.</a:t>
+              <a:t>앞 장의 태국 사례가 하나의 예였다면, 이 장은 그런 시도가 모여 있는 흐름을 보여 줍니다.</a:t>
+            </a:r>
+          </a:p>
+          <a:p>
+            <a:r>
+              <a:rPr sz="1100">
+                <a:latin typeface="맑은 고딕"/>
+                <a:ea typeface="맑은 고딕"/>
+                <a:cs typeface="맑은 고딕"/>
+              </a:rPr>
+              <a:t>AI for Good은 2017년 유엔 산하 국제전기통신연합(ITU)이 시작했고, 빈곤·기아·보건·교육·환경 같은 지구적 과제에 AI를 쓰자는 플랫폼입니다. 매년 제네바에서 총회가 열리고 150개국 넘게 참여합니다.</a:t>
+            </a:r>
+          </a:p>
+          <a:p>
+            <a:r>
+              <a:rPr sz="1100">
+                <a:latin typeface="맑은 고딕"/>
+                <a:ea typeface="맑은 고딕"/>
+                <a:cs typeface="맑은 고딕"/>
+              </a:rPr>
+              <a:t>사례를 하나씩 짚어 주세요. 홍수 예측은 대피 시간을 벌어 주고, 위성 영상 분석은 재난을 몇 분 만에 감지합니다. 알파폴드가 밝힌 단백질 구조는 공개되어 신약 연구에 쓰이고 있습니다.</a:t>
+            </a:r>
+          </a:p>
+          <a:p>
+            <a:r>
+              <a:rPr sz="1100">
+                <a:latin typeface="맑은 고딕"/>
+                <a:ea typeface="맑은 고딕"/>
+                <a:cs typeface="맑은 고딕"/>
+              </a:rPr>
+              <a:t>가장 중요한 것은 맨 아래 문장입니다. 오늘 연수에서 부모가 아이에게 건넬 수 있는 가장 좋은 질문이 ‘이걸로 누구를 도울 수 있을까’입니다. 성능이나 점수가 아니라 쓰임을 묻는 질문이고, 이것이 37장 다섯 가지 역량과 41장 마무리로 이어집니다.</a:t>
+            </a:r>
+          </a:p>
+          <a:p>
+            <a:r>
+              <a:rPr sz="1100">
+                <a:latin typeface="맑은 고딕"/>
+                <a:ea typeface="맑은 고딕"/>
+                <a:cs typeface="맑은 고딕"/>
+              </a:rPr>
+              <a:t>시간이 부족하면 이 장은 사례 하나만 말하고 아래 문장으로 바로 넘어가셔도 됩니다.</a:t>
             </a:r>
           </a:p>
         </p:txBody>
@@ -2897,7 +3077,37 @@
                 <a:ea typeface="맑은 고딕"/>
                 <a:cs typeface="맑은 고딕"/>
               </a:rPr>
-              <a:t>미래 직업 이야기를 여는 장입니다. 학부모의 관심이 가장 크게 움직이는 지점이기도 합니다.\n2024년 노벨 물리학상은 인공신경망의 기초를 세운 존 홉필드와 제프리 힌턴에게, 화학상은 AI로 단백질 구조를 예측·설계한 데이비드 베이커, 데미스 허사비스, 존 점퍼에게 돌아갔습니다. 한 해에 두 개 분야의 노벨상이 AI 관련 연구에 간 것은 처음입니다.\n가장 중요한 해석은 아래 띠입니다. 이분들은 ‘AI 전공자’여서가 아니라 자기 분야의 오래된 문제를 AI라는 도구로 풀어서 상을 받았습니다. 아이에게 필요한 것도 ‘AI를 다루는 법’이 아니라 ‘풀고 싶은 문제’와 ‘그 분야의 실력’이라는 점으로 이어 주십시오.\n코딩 학원을 보내야 하느냐는 질문이 나오면 이 장으로 답하시면 됩니다.</a:t>
+              <a:t>미래 직업 이야기를 여는 장입니다. 학부모의 관심이 가장 크게 움직이는 지점이기도 합니다.</a:t>
+            </a:r>
+          </a:p>
+          <a:p>
+            <a:r>
+              <a:rPr sz="1100">
+                <a:latin typeface="맑은 고딕"/>
+                <a:ea typeface="맑은 고딕"/>
+                <a:cs typeface="맑은 고딕"/>
+              </a:rPr>
+              <a:t>2024년 노벨 물리학상은 인공신경망의 기초를 세운 존 홉필드와 제프리 힌턴에게, 화학상은 AI로 단백질 구조를 예측·설계한 데이비드 베이커, 데미스 허사비스, 존 점퍼에게 돌아갔습니다. 한 해에 두 개 분야의 노벨상이 AI 관련 연구에 간 것은 처음입니다.</a:t>
+            </a:r>
+          </a:p>
+          <a:p>
+            <a:r>
+              <a:rPr sz="1100">
+                <a:latin typeface="맑은 고딕"/>
+                <a:ea typeface="맑은 고딕"/>
+                <a:cs typeface="맑은 고딕"/>
+              </a:rPr>
+              <a:t>가장 중요한 해석은 아래 띠입니다. 이분들은 ‘AI 전공자’여서가 아니라 자기 분야의 오래된 문제를 AI라는 도구로 풀어서 상을 받았습니다. 아이에게 필요한 것도 ‘AI를 다루는 법’이 아니라 ‘풀고 싶은 문제’와 ‘그 분야의 실력’이라는 점으로 이어 주십시오.</a:t>
+            </a:r>
+          </a:p>
+          <a:p>
+            <a:r>
+              <a:rPr sz="1100">
+                <a:latin typeface="맑은 고딕"/>
+                <a:ea typeface="맑은 고딕"/>
+                <a:cs typeface="맑은 고딕"/>
+              </a:rPr>
+              <a:t>코딩 학원을 보내야 하느냐는 질문이 나오면 이 장으로 답하시면 됩니다.</a:t>
             </a:r>
           </a:p>
         </p:txBody>
@@ -2972,7 +3182,37 @@
                 <a:ea typeface="맑은 고딕"/>
                 <a:cs typeface="맑은 고딕"/>
               </a:rPr>
-              <a:t>학부모가 가장 놀라는 장입니다. 천천히 읽어 주세요.\n한국은행이 AI 특허 정보를 이용해 직업별 ‘AI 노출 지수’를 계산한 결과, 국내 취업자 약 341만 명(전체의 12%)이 AI로 대체될 가능성이 높은 것으로 나타났습니다.\n노출 지수가 높은 직업으로 일반 의사와 한의사가 상위 1% 이내, 전문 의사 7%, 회계사와 자산운용가 19%, 변호사 21%로 보고되었습니다. 그래프에서 점이 모두 왼쪽 끝에 몰려 있는 것이 이 이야기의 핵심입니다.\n해석의 주의: ①‘대체 가능성이 높다’는 것이 ‘그 직업이 없어진다’는 뜻은 아닙니다. 업무의 일부가 바뀐다는 의미로 읽어야 합니다. ②2023년 분석이고 기술 변화가 빠른 분야입니다. ③특정 직업을 폄하하는 자리가 아니라, ‘안전한 직업을 찍어 주는 방식’이 잘 통하지 않는다는 점을 보여 주는 자료입니다. 이 단서를 꼭 함께 말해 주십시오.</a:t>
+              <a:t>학부모가 가장 놀라는 장입니다. 천천히 읽어 주세요.</a:t>
+            </a:r>
+          </a:p>
+          <a:p>
+            <a:r>
+              <a:rPr sz="1100">
+                <a:latin typeface="맑은 고딕"/>
+                <a:ea typeface="맑은 고딕"/>
+                <a:cs typeface="맑은 고딕"/>
+              </a:rPr>
+              <a:t>한국은행이 AI 특허 정보를 이용해 직업별 ‘AI 노출 지수’를 계산한 결과, 국내 취업자 약 341만 명(전체의 12%)이 AI로 대체될 가능성이 높은 것으로 나타났습니다.</a:t>
+            </a:r>
+          </a:p>
+          <a:p>
+            <a:r>
+              <a:rPr sz="1100">
+                <a:latin typeface="맑은 고딕"/>
+                <a:ea typeface="맑은 고딕"/>
+                <a:cs typeface="맑은 고딕"/>
+              </a:rPr>
+              <a:t>노출 지수가 높은 직업으로 일반 의사와 한의사가 상위 1% 이내, 전문 의사 7%, 회계사와 자산운용가 19%, 변호사 21%로 보고되었습니다. 그래프에서 점이 모두 왼쪽 끝에 몰려 있는 것이 이 이야기의 핵심입니다.</a:t>
+            </a:r>
+          </a:p>
+          <a:p>
+            <a:r>
+              <a:rPr sz="1100">
+                <a:latin typeface="맑은 고딕"/>
+                <a:ea typeface="맑은 고딕"/>
+                <a:cs typeface="맑은 고딕"/>
+              </a:rPr>
+              <a:t>해석의 주의: ①‘대체 가능성이 높다’는 것이 ‘그 직업이 없어진다’는 뜻은 아닙니다. 업무의 일부가 바뀐다는 의미로 읽어야 합니다. ②2023년 분석이고 기술 변화가 빠른 분야입니다. ③특정 직업을 폄하하는 자리가 아니라, ‘안전한 직업을 찍어 주는 방식’이 잘 통하지 않는다는 점을 보여 주는 자료입니다. 이 단서를 꼭 함께 말해 주십시오.</a:t>
             </a:r>
           </a:p>
         </p:txBody>
@@ -3047,7 +3287,37 @@
                 <a:ea typeface="맑은 고딕"/>
                 <a:cs typeface="맑은 고딕"/>
               </a:rPr>
-              <a:t>이 장은 오늘 연수에서 가장 정직한 장입니다. 다른 학부모 연수에서 이 수치를 들은 분도 계실 겁니다.\n설명 순서: 먼저 문장을 읽어 주고 ‘들어보신 분?’ 하고 손을 들게 합니다. 그다음 세 카드를 넘기며 이 수치의 출처가 확인되지 않는다는 점을 전합니다.\n주의: ‘거짓말이다’라고 단정하지는 마십시오. 정확한 표현은 ‘근거가 되는 원 연구를 확인할 수 없다’입니다. 미래에 새로운 직업이 생긴다는 방향 자체가 틀렸다는 뜻도 아닙니다. 숫자의 정확성과 방향의 타당성은 다른 문제라고 정리해 주세요.\n26장 ‘사실 확인 탐정’ 활동과 연결됩니다. 아이에게 가르치려는 습관을 어른이 먼저 쓴 사례라고 말씀하시면 설득력이 큽니다.</a:t>
+              <a:t>이 장은 오늘 연수에서 가장 정직한 장입니다. 다른 학부모 연수에서 이 수치를 들은 분도 계실 겁니다.</a:t>
+            </a:r>
+          </a:p>
+          <a:p>
+            <a:r>
+              <a:rPr sz="1100">
+                <a:latin typeface="맑은 고딕"/>
+                <a:ea typeface="맑은 고딕"/>
+                <a:cs typeface="맑은 고딕"/>
+              </a:rPr>
+              <a:t>설명 순서: 먼저 문장을 읽어 주고 ‘들어보신 분?’ 하고 손을 들게 합니다. 그다음 세 카드를 넘기며 이 수치의 출처가 확인되지 않는다는 점을 전합니다.</a:t>
+            </a:r>
+          </a:p>
+          <a:p>
+            <a:r>
+              <a:rPr sz="1100">
+                <a:latin typeface="맑은 고딕"/>
+                <a:ea typeface="맑은 고딕"/>
+                <a:cs typeface="맑은 고딕"/>
+              </a:rPr>
+              <a:t>주의: ‘거짓말이다’라고 단정하지는 마십시오. 정확한 표현은 ‘근거가 되는 원 연구를 확인할 수 없다’입니다. 미래에 새로운 직업이 생긴다는 방향 자체가 틀렸다는 뜻도 아닙니다. 숫자의 정확성과 방향의 타당성은 다른 문제라고 정리해 주세요.</a:t>
+            </a:r>
+          </a:p>
+          <a:p>
+            <a:r>
+              <a:rPr sz="1100">
+                <a:latin typeface="맑은 고딕"/>
+                <a:ea typeface="맑은 고딕"/>
+                <a:cs typeface="맑은 고딕"/>
+              </a:rPr>
+              <a:t>29장 ‘사실 확인 탐정’ 활동과 연결됩니다. 아이에게 가르치려는 습관을 어른이 먼저 쓴 사례라고 말씀하시면 설득력이 큽니다.</a:t>
             </a:r>
           </a:p>
         </p:txBody>
@@ -3122,7 +3392,47 @@
                 <a:ea typeface="맑은 고딕"/>
                 <a:cs typeface="맑은 고딕"/>
               </a:rPr>
-              <a:t>미래 직업 묶음(노벨상 → 한국은행 → 65% → 이 장)의 결론입니다.\n세계경제포럼은 2030년까지 1억 7천만 개의 일자리가 새로 생기고 9,200만 개가 사라져 순증 7,800만 개가 될 것으로 전망했습니다. 전체 일자리의 22%가 지형이 바뀌고, 직무에 필요한 기술의 약 40%가 달라질 것으로 보았습니다.\n숫자를 다 외우게 하려는 장이 아닙니다. ‘없어진다’보다 ‘바뀐다’가 크다는 점, 그리고 필요한 기술이 절반 가까이 바뀐다는 점 두 가지만 남기면 충분합니다.\n해석의 주의: 전 세계 기업 대상 설문에 기반한 전망치입니다. 한국의 개별 직업에 그대로 적용되는 숫자가 아니라는 점을 한마디 덧붙여 주십시오.\n바로 다음 장에서 ‘그럼 무엇을 길러 주나’에 답합니다. 두 장을 붙여서 진행해 주세요.</a:t>
+              <a:t>미래 직업 묶음(노벨상 → 한국은행 → 65% → 이 장)의 결론입니다.</a:t>
+            </a:r>
+          </a:p>
+          <a:p>
+            <a:r>
+              <a:rPr sz="1100">
+                <a:latin typeface="맑은 고딕"/>
+                <a:ea typeface="맑은 고딕"/>
+                <a:cs typeface="맑은 고딕"/>
+              </a:rPr>
+              <a:t>세계경제포럼은 2030년까지 1억 7천만 개의 일자리가 새로 생기고 9,200만 개가 사라져 순증 7,800만 개가 될 것으로 전망했습니다. 전체 일자리의 22%가 지형이 바뀌고, 직무에 필요한 기술의 약 40%가 달라질 것으로 보았습니다.</a:t>
+            </a:r>
+          </a:p>
+          <a:p>
+            <a:r>
+              <a:rPr sz="1100">
+                <a:latin typeface="맑은 고딕"/>
+                <a:ea typeface="맑은 고딕"/>
+                <a:cs typeface="맑은 고딕"/>
+              </a:rPr>
+              <a:t>숫자를 다 외우게 하려는 장이 아닙니다. ‘없어진다’보다 ‘바뀐다’가 크다는 점, 그리고 필요한 기술이 절반 가까이 바뀐다는 점 두 가지만 남기면 충분합니다.</a:t>
+            </a:r>
+          </a:p>
+          <a:p>
+            <a:r>
+              <a:rPr sz="1100">
+                <a:latin typeface="맑은 고딕"/>
+                <a:ea typeface="맑은 고딕"/>
+                <a:cs typeface="맑은 고딕"/>
+              </a:rPr>
+              <a:t>해석의 주의: 전 세계 기업 대상 설문에 기반한 전망치입니다. 한국의 개별 직업에 그대로 적용되는 숫자가 아니라는 점을 한마디 덧붙여 주십시오.</a:t>
+            </a:r>
+          </a:p>
+          <a:p>
+            <a:r>
+              <a:rPr sz="1100">
+                <a:latin typeface="맑은 고딕"/>
+                <a:ea typeface="맑은 고딕"/>
+                <a:cs typeface="맑은 고딕"/>
+              </a:rPr>
+              <a:t>바로 다음 장에서 ‘그럼 무엇을 길러 주나’에 답합니다. 두 장을 붙여서 진행해 주세요.</a:t>
             </a:r>
           </a:p>
         </p:txBody>
@@ -3747,7 +4057,7 @@
                 <a:ea typeface="맑은 고딕"/>
                 <a:cs typeface="맑은 고딕"/>
               </a:rPr>
-              <a:t>여기서 ‘환각(hallucination)’이라는 용어를 한 번만 언급하고 넘어가되, 23장에서 다시 다룬다고 예고합니다. 서비스마다 검색 연결 여부가 다르므로 특정 제품의 특성을 모든 AI로 일반화하지 않도록 주의합니다.</a:t>
+              <a:t>여기서 ‘환각(hallucination)’이라는 용어를 한 번만 언급하고 넘어가되, 28장에서 다시 다룬다고 예고합니다. 서비스마다 검색 연결 여부가 다르므로 특정 제품의 특성을 모든 AI로 일반화하지 않도록 주의합니다.</a:t>
             </a:r>
           </a:p>
         </p:txBody>
@@ -3822,7 +4132,7 @@
                 <a:ea typeface="맑은 고딕"/>
                 <a:cs typeface="맑은 고딕"/>
               </a:rPr>
-              <a:t>A와 B는 같은 AI, 같은 문제입니다. 다른 것은 아이가 무엇을 요청했는가뿐입니다. 20장 ‘답 알려줘를 바꿔봅시다’ 활동이 바로 이 갈림길을 B로 돌리는 연습이라고 연결해 주십시오.</a:t>
+              <a:t>A와 B는 같은 AI, 같은 문제입니다. 다른 것은 아이가 무엇을 요청했는가뿐입니다. 24장 ‘답 알려줘를 바꿔봅시다’ 활동이 바로 이 갈림길을 B로 돌리는 연습이라고 연결해 주십시오.</a:t>
             </a:r>
           </a:p>
         </p:txBody>
@@ -4107,7 +4417,7 @@
                 <a:ea typeface="맑은 고딕"/>
                 <a:cs typeface="맑은 고딕"/>
               </a:rPr>
-              <a:t>다음 장에서 세 번째 관문(준비도)을, 13장에서 첫 번째 관문(서비스별 연령 조건)을 구체적으로 다룹니다. 두 번째 관문(학교 지침)은 11~12장, 17장입니다.</a:t>
+              <a:t>다음 장에서 세 번째 관문(준비도)을, 13장에서 첫 번째 관문(서비스별 연령 조건)을 구체적으로 다룹니다. 두 번째 관문(학교 지침)은 11~12장, 21장입니다.</a:t>
             </a:r>
           </a:p>
         </p:txBody>
@@ -29203,7 +29513,7 @@
                 <a:ea typeface="맑은 고딕"/>
                 <a:cs typeface="맑은 고딕"/>
               </a:rPr>
-              <a:t>질문의 구조</a:t>
+              <a:t>프롬프트 공식</a:t>
             </a:r>
           </a:p>
         </p:txBody>
@@ -29288,7 +29598,7 @@
                 <a:ea typeface="맑은 고딕"/>
                 <a:cs typeface="맑은 고딕"/>
               </a:rPr>
-              <a:t>좋은 질문은 네 가지를 담습니다</a:t>
+              <a:t>AI 프롬프트 공식, 네 칸만 채우면 됩니다</a:t>
             </a:r>
           </a:p>
         </p:txBody>
@@ -29329,7 +29639,7 @@
                 <a:ea typeface="맑은 고딕"/>
                 <a:cs typeface="맑은 고딕"/>
               </a:rPr>
-              <a:t>이 네 가지가 들어가면 돌아오는 답이 확 달라집니다.</a:t>
+              <a:t>외울 것은 네 가지뿐입니다. 아이가 이 형식만 익히면 돌아오는 답이 달라집니다.</a:t>
             </a:r>
           </a:p>
         </p:txBody>
@@ -29343,7 +29653,7 @@
         <p:spPr>
           <a:xfrm>
             <a:off x="777240" y="2176272"/>
-            <a:ext cx="2453563" cy="1719072"/>
+            <a:ext cx="2398699" cy="1719072"/>
           </a:xfrm>
           <a:prstGeom prst="roundRect">
             <a:avLst>
@@ -29388,7 +29698,7 @@
         </p:nvSpPr>
         <p:spPr>
           <a:xfrm>
-            <a:off x="1033271" y="2377440"/>
+            <a:off x="1014983" y="2377440"/>
             <a:ext cx="347472" cy="347472"/>
           </a:xfrm>
           <a:prstGeom prst="ellipse">
@@ -29432,7 +29742,7 @@
         </p:nvSpPr>
         <p:spPr>
           <a:xfrm>
-            <a:off x="1033271" y="2423160"/>
+            <a:off x="1014983" y="2423160"/>
             <a:ext cx="347472" cy="274320"/>
           </a:xfrm>
           <a:prstGeom prst="rect">
@@ -29473,8 +29783,8 @@
         </p:nvSpPr>
         <p:spPr>
           <a:xfrm>
-            <a:off x="1033271" y="2834640"/>
-            <a:ext cx="1941499" cy="292608"/>
+            <a:off x="1014983" y="2834640"/>
+            <a:ext cx="1923211" cy="292608"/>
           </a:xfrm>
           <a:prstGeom prst="rect">
             <a:avLst/>
@@ -29514,8 +29824,8 @@
         </p:nvSpPr>
         <p:spPr>
           <a:xfrm>
-            <a:off x="1033271" y="3145536"/>
-            <a:ext cx="1941499" cy="640080"/>
+            <a:off x="1014983" y="3145536"/>
+            <a:ext cx="1923211" cy="640080"/>
           </a:xfrm>
           <a:prstGeom prst="rect">
             <a:avLst/>
@@ -29549,14 +29859,55 @@
       </p:sp>
       <p:sp>
         <p:nvSpPr>
-          <p:cNvPr id="11" name="Rounded Rectangle 10"/>
+          <p:cNvPr id="11" name="TextBox 10"/>
+          <p:cNvSpPr txBox="1"/>
+          <p:nvPr/>
+        </p:nvSpPr>
+        <p:spPr>
+          <a:xfrm>
+            <a:off x="3175939" y="2871216"/>
+            <a:ext cx="347472" cy="329184"/>
+          </a:xfrm>
+          <a:prstGeom prst="rect">
+            <a:avLst/>
+          </a:prstGeom>
+          <a:noFill/>
+        </p:spPr>
+        <p:txBody>
+          <a:bodyPr wrap="square" anchor="t" lIns="0" rIns="0" tIns="0" bIns="0">
+            <a:spAutoFit/>
+          </a:bodyPr>
+          <a:lstStyle/>
+          <a:p>
+            <a:pPr algn="ctr">
+              <a:lnSpc>
+                <a:spcPct val="115000"/>
+              </a:lnSpc>
+            </a:pPr>
+            <a:r>
+              <a:rPr sz="2000" b="1">
+                <a:solidFill>
+                  <a:srgbClr val="7B8894"/>
+                </a:solidFill>
+                <a:latin typeface="맑은 고딕"/>
+                <a:ea typeface="맑은 고딕"/>
+                <a:cs typeface="맑은 고딕"/>
+              </a:rPr>
+              <a:t>+</a:t>
+            </a:r>
+          </a:p>
+        </p:txBody>
+      </p:sp>
+      <p:sp>
+        <p:nvSpPr>
+          <p:cNvPr id="12" name="Rounded Rectangle 11"/>
           <p:cNvSpPr/>
           <p:nvPr/>
         </p:nvSpPr>
         <p:spPr>
           <a:xfrm>
-            <a:off x="3505123" y="2176272"/>
-            <a:ext cx="2453563" cy="1719072"/>
+            <a:off x="3523411" y="2176272"/>
+            <a:ext cx="2398699" cy="1719072"/>
           </a:xfrm>
           <a:prstGeom prst="roundRect">
             <a:avLst>
@@ -29595,7 +29946,7 @@
       </p:sp>
       <p:sp>
         <p:nvSpPr>
-          <p:cNvPr id="12" name="Oval 11"/>
+          <p:cNvPr id="13" name="Oval 12"/>
           <p:cNvSpPr/>
           <p:nvPr/>
         </p:nvSpPr>
@@ -29639,7 +29990,7 @@
       </p:sp>
       <p:sp>
         <p:nvSpPr>
-          <p:cNvPr id="13" name="TextBox 12"/>
+          <p:cNvPr id="14" name="TextBox 13"/>
           <p:cNvSpPr txBox="1"/>
           <p:nvPr/>
         </p:nvSpPr>
@@ -29680,14 +30031,14 @@
       </p:sp>
       <p:sp>
         <p:nvSpPr>
-          <p:cNvPr id="14" name="TextBox 13"/>
+          <p:cNvPr id="15" name="TextBox 14"/>
           <p:cNvSpPr txBox="1"/>
           <p:nvPr/>
         </p:nvSpPr>
         <p:spPr>
           <a:xfrm>
             <a:off x="3761155" y="2834640"/>
-            <a:ext cx="1941499" cy="292608"/>
+            <a:ext cx="1923211" cy="292608"/>
           </a:xfrm>
           <a:prstGeom prst="rect">
             <a:avLst/>
@@ -29721,14 +30072,14 @@
       </p:sp>
       <p:sp>
         <p:nvSpPr>
-          <p:cNvPr id="15" name="TextBox 14"/>
+          <p:cNvPr id="16" name="TextBox 15"/>
           <p:cNvSpPr txBox="1"/>
           <p:nvPr/>
         </p:nvSpPr>
         <p:spPr>
           <a:xfrm>
             <a:off x="3761155" y="3145536"/>
-            <a:ext cx="1941499" cy="640080"/>
+            <a:ext cx="1923211" cy="640080"/>
           </a:xfrm>
           <a:prstGeom prst="rect">
             <a:avLst/>
@@ -29762,14 +30113,55 @@
       </p:sp>
       <p:sp>
         <p:nvSpPr>
-          <p:cNvPr id="16" name="Rounded Rectangle 15"/>
+          <p:cNvPr id="17" name="TextBox 16"/>
+          <p:cNvSpPr txBox="1"/>
+          <p:nvPr/>
+        </p:nvSpPr>
+        <p:spPr>
+          <a:xfrm>
+            <a:off x="5922111" y="2871216"/>
+            <a:ext cx="347472" cy="329184"/>
+          </a:xfrm>
+          <a:prstGeom prst="rect">
+            <a:avLst/>
+          </a:prstGeom>
+          <a:noFill/>
+        </p:spPr>
+        <p:txBody>
+          <a:bodyPr wrap="square" anchor="t" lIns="0" rIns="0" tIns="0" bIns="0">
+            <a:spAutoFit/>
+          </a:bodyPr>
+          <a:lstStyle/>
+          <a:p>
+            <a:pPr algn="ctr">
+              <a:lnSpc>
+                <a:spcPct val="115000"/>
+              </a:lnSpc>
+            </a:pPr>
+            <a:r>
+              <a:rPr sz="2000" b="1">
+                <a:solidFill>
+                  <a:srgbClr val="7B8894"/>
+                </a:solidFill>
+                <a:latin typeface="맑은 고딕"/>
+                <a:ea typeface="맑은 고딕"/>
+                <a:cs typeface="맑은 고딕"/>
+              </a:rPr>
+              <a:t>+</a:t>
+            </a:r>
+          </a:p>
+        </p:txBody>
+      </p:sp>
+      <p:sp>
+        <p:nvSpPr>
+          <p:cNvPr id="18" name="Rounded Rectangle 17"/>
           <p:cNvSpPr/>
           <p:nvPr/>
         </p:nvSpPr>
         <p:spPr>
           <a:xfrm>
-            <a:off x="6233007" y="2176272"/>
-            <a:ext cx="2453563" cy="1719072"/>
+            <a:off x="6269583" y="2176272"/>
+            <a:ext cx="2398699" cy="1719072"/>
           </a:xfrm>
           <a:prstGeom prst="roundRect">
             <a:avLst>
@@ -29808,13 +30200,13 @@
       </p:sp>
       <p:sp>
         <p:nvSpPr>
-          <p:cNvPr id="17" name="Oval 16"/>
+          <p:cNvPr id="19" name="Oval 18"/>
           <p:cNvSpPr/>
           <p:nvPr/>
         </p:nvSpPr>
         <p:spPr>
           <a:xfrm>
-            <a:off x="6489039" y="2377440"/>
+            <a:off x="6507327" y="2377440"/>
             <a:ext cx="347472" cy="347472"/>
           </a:xfrm>
           <a:prstGeom prst="ellipse">
@@ -29852,13 +30244,13 @@
       </p:sp>
       <p:sp>
         <p:nvSpPr>
-          <p:cNvPr id="18" name="TextBox 17"/>
-          <p:cNvSpPr txBox="1"/>
-          <p:nvPr/>
-        </p:nvSpPr>
-        <p:spPr>
-          <a:xfrm>
-            <a:off x="6489039" y="2423160"/>
+          <p:cNvPr id="20" name="TextBox 19"/>
+          <p:cNvSpPr txBox="1"/>
+          <p:nvPr/>
+        </p:nvSpPr>
+        <p:spPr>
+          <a:xfrm>
+            <a:off x="6507327" y="2423160"/>
             <a:ext cx="347472" cy="274320"/>
           </a:xfrm>
           <a:prstGeom prst="rect">
@@ -29893,14 +30285,14 @@
       </p:sp>
       <p:sp>
         <p:nvSpPr>
-          <p:cNvPr id="19" name="TextBox 18"/>
-          <p:cNvSpPr txBox="1"/>
-          <p:nvPr/>
-        </p:nvSpPr>
-        <p:spPr>
-          <a:xfrm>
-            <a:off x="6489039" y="2834640"/>
-            <a:ext cx="1941499" cy="292608"/>
+          <p:cNvPr id="21" name="TextBox 20"/>
+          <p:cNvSpPr txBox="1"/>
+          <p:nvPr/>
+        </p:nvSpPr>
+        <p:spPr>
+          <a:xfrm>
+            <a:off x="6507327" y="2834640"/>
+            <a:ext cx="1923211" cy="292608"/>
           </a:xfrm>
           <a:prstGeom prst="rect">
             <a:avLst/>
@@ -29934,14 +30326,14 @@
       </p:sp>
       <p:sp>
         <p:nvSpPr>
-          <p:cNvPr id="20" name="TextBox 19"/>
-          <p:cNvSpPr txBox="1"/>
-          <p:nvPr/>
-        </p:nvSpPr>
-        <p:spPr>
-          <a:xfrm>
-            <a:off x="6489039" y="3145536"/>
-            <a:ext cx="1941499" cy="640080"/>
+          <p:cNvPr id="22" name="TextBox 21"/>
+          <p:cNvSpPr txBox="1"/>
+          <p:nvPr/>
+        </p:nvSpPr>
+        <p:spPr>
+          <a:xfrm>
+            <a:off x="6507327" y="3145536"/>
+            <a:ext cx="1923211" cy="640080"/>
           </a:xfrm>
           <a:prstGeom prst="rect">
             <a:avLst/>
@@ -29975,14 +30367,55 @@
       </p:sp>
       <p:sp>
         <p:nvSpPr>
-          <p:cNvPr id="21" name="Rounded Rectangle 20"/>
+          <p:cNvPr id="23" name="TextBox 22"/>
+          <p:cNvSpPr txBox="1"/>
+          <p:nvPr/>
+        </p:nvSpPr>
+        <p:spPr>
+          <a:xfrm>
+            <a:off x="8668283" y="2871216"/>
+            <a:ext cx="347472" cy="329184"/>
+          </a:xfrm>
+          <a:prstGeom prst="rect">
+            <a:avLst/>
+          </a:prstGeom>
+          <a:noFill/>
+        </p:spPr>
+        <p:txBody>
+          <a:bodyPr wrap="square" anchor="t" lIns="0" rIns="0" tIns="0" bIns="0">
+            <a:spAutoFit/>
+          </a:bodyPr>
+          <a:lstStyle/>
+          <a:p>
+            <a:pPr algn="ctr">
+              <a:lnSpc>
+                <a:spcPct val="115000"/>
+              </a:lnSpc>
+            </a:pPr>
+            <a:r>
+              <a:rPr sz="2000" b="1">
+                <a:solidFill>
+                  <a:srgbClr val="7B8894"/>
+                </a:solidFill>
+                <a:latin typeface="맑은 고딕"/>
+                <a:ea typeface="맑은 고딕"/>
+                <a:cs typeface="맑은 고딕"/>
+              </a:rPr>
+              <a:t>+</a:t>
+            </a:r>
+          </a:p>
+        </p:txBody>
+      </p:sp>
+      <p:sp>
+        <p:nvSpPr>
+          <p:cNvPr id="24" name="Rounded Rectangle 23"/>
           <p:cNvSpPr/>
           <p:nvPr/>
         </p:nvSpPr>
         <p:spPr>
           <a:xfrm>
-            <a:off x="8960891" y="2176272"/>
-            <a:ext cx="2453563" cy="1719072"/>
+            <a:off x="9015755" y="2176272"/>
+            <a:ext cx="2398699" cy="1719072"/>
           </a:xfrm>
           <a:prstGeom prst="roundRect">
             <a:avLst>
@@ -30021,13 +30454,13 @@
       </p:sp>
       <p:sp>
         <p:nvSpPr>
-          <p:cNvPr id="22" name="Oval 21"/>
+          <p:cNvPr id="25" name="Oval 24"/>
           <p:cNvSpPr/>
           <p:nvPr/>
         </p:nvSpPr>
         <p:spPr>
           <a:xfrm>
-            <a:off x="9216923" y="2377440"/>
+            <a:off x="9253499" y="2377440"/>
             <a:ext cx="347472" cy="347472"/>
           </a:xfrm>
           <a:prstGeom prst="ellipse">
@@ -30065,13 +30498,13 @@
       </p:sp>
       <p:sp>
         <p:nvSpPr>
-          <p:cNvPr id="23" name="TextBox 22"/>
-          <p:cNvSpPr txBox="1"/>
-          <p:nvPr/>
-        </p:nvSpPr>
-        <p:spPr>
-          <a:xfrm>
-            <a:off x="9216923" y="2423160"/>
+          <p:cNvPr id="26" name="TextBox 25"/>
+          <p:cNvSpPr txBox="1"/>
+          <p:nvPr/>
+        </p:nvSpPr>
+        <p:spPr>
+          <a:xfrm>
+            <a:off x="9253499" y="2423160"/>
             <a:ext cx="347472" cy="274320"/>
           </a:xfrm>
           <a:prstGeom prst="rect">
@@ -30106,14 +30539,14 @@
       </p:sp>
       <p:sp>
         <p:nvSpPr>
-          <p:cNvPr id="24" name="TextBox 23"/>
-          <p:cNvSpPr txBox="1"/>
-          <p:nvPr/>
-        </p:nvSpPr>
-        <p:spPr>
-          <a:xfrm>
-            <a:off x="9216923" y="2834640"/>
-            <a:ext cx="1941499" cy="292608"/>
+          <p:cNvPr id="27" name="TextBox 26"/>
+          <p:cNvSpPr txBox="1"/>
+          <p:nvPr/>
+        </p:nvSpPr>
+        <p:spPr>
+          <a:xfrm>
+            <a:off x="9253499" y="2834640"/>
+            <a:ext cx="1923211" cy="292608"/>
           </a:xfrm>
           <a:prstGeom prst="rect">
             <a:avLst/>
@@ -30147,14 +30580,14 @@
       </p:sp>
       <p:sp>
         <p:nvSpPr>
-          <p:cNvPr id="25" name="TextBox 24"/>
-          <p:cNvSpPr txBox="1"/>
-          <p:nvPr/>
-        </p:nvSpPr>
-        <p:spPr>
-          <a:xfrm>
-            <a:off x="9216923" y="3145536"/>
-            <a:ext cx="1941499" cy="640080"/>
+          <p:cNvPr id="28" name="TextBox 27"/>
+          <p:cNvSpPr txBox="1"/>
+          <p:nvPr/>
+        </p:nvSpPr>
+        <p:spPr>
+          <a:xfrm>
+            <a:off x="9253499" y="3145536"/>
+            <a:ext cx="1923211" cy="640080"/>
           </a:xfrm>
           <a:prstGeom prst="rect">
             <a:avLst/>
@@ -30188,7 +30621,7 @@
       </p:sp>
       <p:sp>
         <p:nvSpPr>
-          <p:cNvPr id="26" name="Rounded Rectangle 25"/>
+          <p:cNvPr id="29" name="Rounded Rectangle 28"/>
           <p:cNvSpPr/>
           <p:nvPr/>
         </p:nvSpPr>
@@ -30236,14 +30669,14 @@
       </p:sp>
       <p:sp>
         <p:nvSpPr>
-          <p:cNvPr id="27" name="TextBox 26"/>
+          <p:cNvPr id="30" name="TextBox 29"/>
           <p:cNvSpPr txBox="1"/>
           <p:nvPr/>
         </p:nvSpPr>
         <p:spPr>
           <a:xfrm>
             <a:off x="1143000" y="4261104"/>
-            <a:ext cx="4572000" cy="274320"/>
+            <a:ext cx="6400800" cy="274320"/>
           </a:xfrm>
           <a:prstGeom prst="rect">
             <a:avLst/>
@@ -30264,20 +30697,31 @@
             <a:r>
               <a:rPr sz="1300" b="1">
                 <a:solidFill>
+                  <a:srgbClr val="1D4ED8"/>
+                </a:solidFill>
+                <a:latin typeface="맑은 고딕"/>
+                <a:ea typeface="맑은 고딕"/>
+                <a:cs typeface="맑은 고딕"/>
+              </a:rPr>
+              <a:t>=  </a:t>
+            </a:r>
+            <a:r>
+              <a:rPr sz="1300" b="1">
+                <a:solidFill>
                   <a:srgbClr val="0E7C86"/>
                 </a:solidFill>
                 <a:latin typeface="맑은 고딕"/>
                 <a:ea typeface="맑은 고딕"/>
                 <a:cs typeface="맑은 고딕"/>
               </a:rPr>
-              <a:t>네 가지를 합치면 이런 질문이 됩니다</a:t>
-            </a:r>
-          </a:p>
-        </p:txBody>
-      </p:sp>
-      <p:sp>
-        <p:nvSpPr>
-          <p:cNvPr id="28" name="Rectangle 27"/>
+              <a:t>네 칸을 이어 붙이면 이런 한 문장이 됩니다</a:t>
+            </a:r>
+          </a:p>
+        </p:txBody>
+      </p:sp>
+      <p:sp>
+        <p:nvSpPr>
+          <p:cNvPr id="31" name="Rectangle 30"/>
           <p:cNvSpPr/>
           <p:nvPr/>
         </p:nvSpPr>
@@ -30321,7 +30765,7 @@
       </p:sp>
       <p:sp>
         <p:nvSpPr>
-          <p:cNvPr id="29" name="TextBox 28"/>
+          <p:cNvPr id="32" name="TextBox 31"/>
           <p:cNvSpPr txBox="1"/>
           <p:nvPr/>
         </p:nvSpPr>
@@ -30407,7 +30851,7 @@
       </p:sp>
       <p:sp>
         <p:nvSpPr>
-          <p:cNvPr id="30" name="Rectangle 29"/>
+          <p:cNvPr id="33" name="Rectangle 32"/>
           <p:cNvSpPr/>
           <p:nvPr/>
         </p:nvSpPr>
@@ -30451,7 +30895,7 @@
       </p:sp>
       <p:sp>
         <p:nvSpPr>
-          <p:cNvPr id="31" name="TextBox 30"/>
+          <p:cNvPr id="34" name="TextBox 33"/>
           <p:cNvSpPr txBox="1"/>
           <p:nvPr/>
         </p:nvSpPr>
@@ -43108,8 +43552,25 @@
                 <a:ea typeface="맑은 고딕"/>
                 <a:cs typeface="맑은 고딕"/>
               </a:rPr>
-              <a:t>세계경제포럼의 『직업의 미래』
-보고서에 등장했습니다.</a:t>
+              <a:t>세계경제포럼의 『직업의 미래』</a:t>
+            </a:r>
+          </a:p>
+          <a:p>
+            <a:pPr algn="l">
+              <a:lnSpc>
+                <a:spcPct val="130000"/>
+              </a:lnSpc>
+            </a:pPr>
+            <a:r>
+              <a:rPr sz="1250" b="0">
+                <a:solidFill>
+                  <a:srgbClr val="3E4C59"/>
+                </a:solidFill>
+                <a:latin typeface="맑은 고딕"/>
+                <a:ea typeface="맑은 고딕"/>
+                <a:cs typeface="맑은 고딕"/>
+              </a:rPr>
+              <a:t>보고서에 등장했습니다.</a:t>
             </a:r>
           </a:p>
         </p:txBody>
@@ -43324,8 +43785,25 @@
                 <a:ea typeface="맑은 고딕"/>
                 <a:cs typeface="맑은 고딕"/>
               </a:rPr>
-              <a:t>‘널리 인용되는 추정치’라고
-소개되었을 뿐입니다.</a:t>
+              <a:t>‘널리 인용되는 추정치’라고</a:t>
+            </a:r>
+          </a:p>
+          <a:p>
+            <a:pPr algn="l">
+              <a:lnSpc>
+                <a:spcPct val="130000"/>
+              </a:lnSpc>
+            </a:pPr>
+            <a:r>
+              <a:rPr sz="1250" b="0">
+                <a:solidFill>
+                  <a:srgbClr val="3E4C59"/>
+                </a:solidFill>
+                <a:latin typeface="맑은 고딕"/>
+                <a:ea typeface="맑은 고딕"/>
+                <a:cs typeface="맑은 고딕"/>
+              </a:rPr>
+              <a:t>소개되었을 뿐입니다.</a:t>
             </a:r>
           </a:p>
         </p:txBody>
@@ -43540,8 +44018,25 @@
                 <a:ea typeface="맑은 고딕"/>
                 <a:cs typeface="맑은 고딕"/>
               </a:rPr>
-              <a:t>교육 연구자들이 출처를
-추적했지만 확인하지 못했습니다.</a:t>
+              <a:t>교육 연구자들이 출처를</a:t>
+            </a:r>
+          </a:p>
+          <a:p>
+            <a:pPr algn="l">
+              <a:lnSpc>
+                <a:spcPct val="130000"/>
+              </a:lnSpc>
+            </a:pPr>
+            <a:r>
+              <a:rPr sz="1250" b="0">
+                <a:solidFill>
+                  <a:srgbClr val="3E4C59"/>
+                </a:solidFill>
+                <a:latin typeface="맑은 고딕"/>
+                <a:ea typeface="맑은 고딕"/>
+                <a:cs typeface="맑은 고딕"/>
+              </a:rPr>
+              <a:t>추적했지만 확인하지 못했습니다.</a:t>
             </a:r>
           </a:p>
         </p:txBody>
